--- a/260418_add/ppt/Fig5_nested_LASSO_native_editable.pptx
+++ b/260418_add/ppt/Fig5_nested_LASSO_native_editable.pptx
@@ -56369,50 +56369,6 @@
         </p:nvSpPr>
         <p:spPr>
           <a:xfrm rot="10048138">
-            <a:off x="1068970" y="541770"/>
-            <a:ext cx="4127757" cy="2765011"/>
-          </a:xfrm>
-          <a:prstGeom prst="ellipse">
-            <a:avLst/>
-          </a:prstGeom>
-          <a:noFill/>
-          <a:ln w="6350">
-            <a:solidFill>
-              <a:srgbClr val="0A7D6E"/>
-            </a:solidFill>
-          </a:ln>
-          <a:effectLst/>
-        </p:spPr>
-        <p:style>
-          <a:lnRef idx="1">
-            <a:schemeClr val="accent1"/>
-          </a:lnRef>
-          <a:fillRef idx="3">
-            <a:schemeClr val="accent1"/>
-          </a:fillRef>
-          <a:effectRef idx="2">
-            <a:schemeClr val="accent1"/>
-          </a:effectRef>
-          <a:fontRef idx="minor">
-            <a:schemeClr val="lt1"/>
-          </a:fontRef>
-        </p:style>
-        <p:txBody>
-          <a:bodyPr rtlCol="0" anchor="ctr"/>
-          <a:lstStyle/>
-          <a:p>
-            <a:pPr algn="ctr"/>
-          </a:p>
-        </p:txBody>
-      </p:sp>
-      <p:sp>
-        <p:nvSpPr>
-          <p:cNvPr id="28" name="Oval 27"/>
-          <p:cNvSpPr/>
-          <p:nvPr/>
-        </p:nvSpPr>
-        <p:spPr>
-          <a:xfrm rot="10048138">
             <a:off x="1853954" y="1067598"/>
             <a:ext cx="2557789" cy="1713355"/>
           </a:xfrm>
@@ -56451,7 +56407,7 @@
       </p:sp>
       <p:sp>
         <p:nvSpPr>
-          <p:cNvPr id="29" name="Diamond 28"/>
+          <p:cNvPr id="28" name="Diamond 27"/>
           <p:cNvSpPr/>
           <p:nvPr/>
         </p:nvSpPr>
@@ -56497,51 +56453,7 @@
       </p:sp>
       <p:sp>
         <p:nvSpPr>
-          <p:cNvPr id="30" name="Oval 29"/>
-          <p:cNvSpPr/>
-          <p:nvPr/>
-        </p:nvSpPr>
-        <p:spPr>
-          <a:xfrm rot="11408180">
-            <a:off x="487877" y="1199066"/>
-            <a:ext cx="4594039" cy="1850658"/>
-          </a:xfrm>
-          <a:prstGeom prst="ellipse">
-            <a:avLst/>
-          </a:prstGeom>
-          <a:noFill/>
-          <a:ln w="6350">
-            <a:solidFill>
-              <a:srgbClr val="C53E1F"/>
-            </a:solidFill>
-          </a:ln>
-          <a:effectLst/>
-        </p:spPr>
-        <p:style>
-          <a:lnRef idx="1">
-            <a:schemeClr val="accent1"/>
-          </a:lnRef>
-          <a:fillRef idx="3">
-            <a:schemeClr val="accent1"/>
-          </a:fillRef>
-          <a:effectRef idx="2">
-            <a:schemeClr val="accent1"/>
-          </a:effectRef>
-          <a:fontRef idx="minor">
-            <a:schemeClr val="lt1"/>
-          </a:fontRef>
-        </p:style>
-        <p:txBody>
-          <a:bodyPr rtlCol="0" anchor="ctr"/>
-          <a:lstStyle/>
-          <a:p>
-            <a:pPr algn="ctr"/>
-          </a:p>
-        </p:txBody>
-      </p:sp>
-      <p:sp>
-        <p:nvSpPr>
-          <p:cNvPr id="31" name="Oval 30"/>
+          <p:cNvPr id="29" name="Oval 28"/>
           <p:cNvSpPr/>
           <p:nvPr/>
         </p:nvSpPr>
@@ -56585,7 +56497,7 @@
       </p:sp>
       <p:sp>
         <p:nvSpPr>
-          <p:cNvPr id="32" name="Diamond 31"/>
+          <p:cNvPr id="30" name="Diamond 29"/>
           <p:cNvSpPr/>
           <p:nvPr/>
         </p:nvSpPr>
@@ -56631,7 +56543,7 @@
       </p:sp>
       <p:sp>
         <p:nvSpPr>
-          <p:cNvPr id="33" name="Oval 32"/>
+          <p:cNvPr id="31" name="Oval 30"/>
           <p:cNvSpPr/>
           <p:nvPr/>
         </p:nvSpPr>
@@ -56677,7 +56589,7 @@
       </p:sp>
       <p:sp>
         <p:nvSpPr>
-          <p:cNvPr id="34" name="TextBox 33"/>
+          <p:cNvPr id="32" name="TextBox 31"/>
           <p:cNvSpPr txBox="1"/>
           <p:nvPr/>
         </p:nvSpPr>
@@ -56713,7 +56625,7 @@
       </p:sp>
       <p:sp>
         <p:nvSpPr>
-          <p:cNvPr id="35" name="Oval 34"/>
+          <p:cNvPr id="33" name="Oval 32"/>
           <p:cNvSpPr/>
           <p:nvPr/>
         </p:nvSpPr>
@@ -56759,7 +56671,7 @@
       </p:sp>
       <p:sp>
         <p:nvSpPr>
-          <p:cNvPr id="36" name="Oval 35"/>
+          <p:cNvPr id="34" name="Oval 33"/>
           <p:cNvSpPr/>
           <p:nvPr/>
         </p:nvSpPr>
@@ -56805,7 +56717,7 @@
       </p:sp>
       <p:sp>
         <p:nvSpPr>
-          <p:cNvPr id="37" name="Oval 36"/>
+          <p:cNvPr id="35" name="Oval 34"/>
           <p:cNvSpPr/>
           <p:nvPr/>
         </p:nvSpPr>
@@ -56851,7 +56763,7 @@
       </p:sp>
       <p:sp>
         <p:nvSpPr>
-          <p:cNvPr id="38" name="Oval 37"/>
+          <p:cNvPr id="36" name="Oval 35"/>
           <p:cNvSpPr/>
           <p:nvPr/>
         </p:nvSpPr>
@@ -56897,7 +56809,7 @@
       </p:sp>
       <p:sp>
         <p:nvSpPr>
-          <p:cNvPr id="39" name="TextBox 38"/>
+          <p:cNvPr id="37" name="TextBox 36"/>
           <p:cNvSpPr txBox="1"/>
           <p:nvPr/>
         </p:nvSpPr>
@@ -56933,7 +56845,7 @@
       </p:sp>
       <p:sp>
         <p:nvSpPr>
-          <p:cNvPr id="40" name="Oval 39"/>
+          <p:cNvPr id="38" name="Oval 37"/>
           <p:cNvSpPr/>
           <p:nvPr/>
         </p:nvSpPr>
@@ -56979,7 +56891,7 @@
       </p:sp>
       <p:sp>
         <p:nvSpPr>
-          <p:cNvPr id="41" name="Oval 40"/>
+          <p:cNvPr id="39" name="Oval 38"/>
           <p:cNvSpPr/>
           <p:nvPr/>
         </p:nvSpPr>
@@ -57025,7 +56937,7 @@
       </p:sp>
       <p:sp>
         <p:nvSpPr>
-          <p:cNvPr id="42" name="TextBox 41"/>
+          <p:cNvPr id="40" name="TextBox 39"/>
           <p:cNvSpPr txBox="1"/>
           <p:nvPr/>
         </p:nvSpPr>
@@ -57061,7 +56973,7 @@
       </p:sp>
       <p:sp>
         <p:nvSpPr>
-          <p:cNvPr id="43" name="Oval 42"/>
+          <p:cNvPr id="41" name="Oval 40"/>
           <p:cNvSpPr/>
           <p:nvPr/>
         </p:nvSpPr>
@@ -57107,7 +57019,7 @@
       </p:sp>
       <p:sp>
         <p:nvSpPr>
-          <p:cNvPr id="44" name="TextBox 43"/>
+          <p:cNvPr id="42" name="TextBox 41"/>
           <p:cNvSpPr txBox="1"/>
           <p:nvPr/>
         </p:nvSpPr>
@@ -57143,7 +57055,7 @@
       </p:sp>
       <p:sp>
         <p:nvSpPr>
-          <p:cNvPr id="45" name="Oval 44"/>
+          <p:cNvPr id="43" name="Oval 42"/>
           <p:cNvSpPr/>
           <p:nvPr/>
         </p:nvSpPr>
@@ -57189,7 +57101,7 @@
       </p:sp>
       <p:sp>
         <p:nvSpPr>
-          <p:cNvPr id="46" name="Oval 45"/>
+          <p:cNvPr id="44" name="Oval 43"/>
           <p:cNvSpPr/>
           <p:nvPr/>
         </p:nvSpPr>
@@ -57235,7 +57147,7 @@
       </p:sp>
       <p:sp>
         <p:nvSpPr>
-          <p:cNvPr id="47" name="TextBox 46"/>
+          <p:cNvPr id="45" name="TextBox 44"/>
           <p:cNvSpPr txBox="1"/>
           <p:nvPr/>
         </p:nvSpPr>
@@ -57271,7 +57183,7 @@
       </p:sp>
       <p:sp>
         <p:nvSpPr>
-          <p:cNvPr id="48" name="Oval 47"/>
+          <p:cNvPr id="46" name="Oval 45"/>
           <p:cNvSpPr/>
           <p:nvPr/>
         </p:nvSpPr>
@@ -57317,7 +57229,7 @@
       </p:sp>
       <p:sp>
         <p:nvSpPr>
-          <p:cNvPr id="49" name="TextBox 48"/>
+          <p:cNvPr id="47" name="TextBox 46"/>
           <p:cNvSpPr txBox="1"/>
           <p:nvPr/>
         </p:nvSpPr>
@@ -57353,7 +57265,7 @@
       </p:sp>
       <p:sp>
         <p:nvSpPr>
-          <p:cNvPr id="50" name="Oval 49"/>
+          <p:cNvPr id="48" name="Oval 47"/>
           <p:cNvSpPr/>
           <p:nvPr/>
         </p:nvSpPr>
@@ -57399,7 +57311,7 @@
       </p:sp>
       <p:sp>
         <p:nvSpPr>
-          <p:cNvPr id="51" name="TextBox 50"/>
+          <p:cNvPr id="49" name="TextBox 48"/>
           <p:cNvSpPr txBox="1"/>
           <p:nvPr/>
         </p:nvSpPr>
@@ -57435,7 +57347,7 @@
       </p:sp>
       <p:sp>
         <p:nvSpPr>
-          <p:cNvPr id="52" name="Oval 51"/>
+          <p:cNvPr id="50" name="Oval 49"/>
           <p:cNvSpPr/>
           <p:nvPr/>
         </p:nvSpPr>
@@ -57481,7 +57393,7 @@
       </p:sp>
       <p:sp>
         <p:nvSpPr>
-          <p:cNvPr id="53" name="Oval 52"/>
+          <p:cNvPr id="51" name="Oval 50"/>
           <p:cNvSpPr/>
           <p:nvPr/>
         </p:nvSpPr>
@@ -57527,7 +57439,7 @@
       </p:sp>
       <p:sp>
         <p:nvSpPr>
-          <p:cNvPr id="54" name="Oval 53"/>
+          <p:cNvPr id="52" name="Oval 51"/>
           <p:cNvSpPr/>
           <p:nvPr/>
         </p:nvSpPr>
@@ -57573,7 +57485,7 @@
       </p:sp>
       <p:sp>
         <p:nvSpPr>
-          <p:cNvPr id="55" name="Oval 54"/>
+          <p:cNvPr id="53" name="Oval 52"/>
           <p:cNvSpPr/>
           <p:nvPr/>
         </p:nvSpPr>
@@ -57619,7 +57531,7 @@
       </p:sp>
       <p:sp>
         <p:nvSpPr>
-          <p:cNvPr id="56" name="TextBox 55"/>
+          <p:cNvPr id="54" name="TextBox 53"/>
           <p:cNvSpPr txBox="1"/>
           <p:nvPr/>
         </p:nvSpPr>
@@ -57655,7 +57567,7 @@
       </p:sp>
       <p:sp>
         <p:nvSpPr>
-          <p:cNvPr id="57" name="Oval 56"/>
+          <p:cNvPr id="55" name="Oval 54"/>
           <p:cNvSpPr/>
           <p:nvPr/>
         </p:nvSpPr>
@@ -57701,7 +57613,7 @@
       </p:sp>
       <p:sp>
         <p:nvSpPr>
-          <p:cNvPr id="58" name="TextBox 57"/>
+          <p:cNvPr id="56" name="TextBox 55"/>
           <p:cNvSpPr txBox="1"/>
           <p:nvPr/>
         </p:nvSpPr>
@@ -57737,7 +57649,7 @@
       </p:sp>
       <p:sp>
         <p:nvSpPr>
-          <p:cNvPr id="59" name="Oval 58"/>
+          <p:cNvPr id="57" name="Oval 56"/>
           <p:cNvSpPr/>
           <p:nvPr/>
         </p:nvSpPr>
@@ -57783,7 +57695,7 @@
       </p:sp>
       <p:sp>
         <p:nvSpPr>
-          <p:cNvPr id="60" name="Oval 59"/>
+          <p:cNvPr id="58" name="Oval 57"/>
           <p:cNvSpPr/>
           <p:nvPr/>
         </p:nvSpPr>
@@ -57829,7 +57741,7 @@
       </p:sp>
       <p:sp>
         <p:nvSpPr>
-          <p:cNvPr id="61" name="Oval 60"/>
+          <p:cNvPr id="59" name="Oval 58"/>
           <p:cNvSpPr/>
           <p:nvPr/>
         </p:nvSpPr>
@@ -57875,7 +57787,7 @@
       </p:sp>
       <p:sp>
         <p:nvSpPr>
-          <p:cNvPr id="62" name="Oval 61"/>
+          <p:cNvPr id="60" name="Oval 59"/>
           <p:cNvSpPr/>
           <p:nvPr/>
         </p:nvSpPr>
@@ -57921,7 +57833,7 @@
       </p:sp>
       <p:sp>
         <p:nvSpPr>
-          <p:cNvPr id="63" name="TextBox 62"/>
+          <p:cNvPr id="61" name="TextBox 60"/>
           <p:cNvSpPr txBox="1"/>
           <p:nvPr/>
         </p:nvSpPr>
@@ -57957,7 +57869,7 @@
       </p:sp>
       <p:sp>
         <p:nvSpPr>
-          <p:cNvPr id="64" name="Oval 63"/>
+          <p:cNvPr id="62" name="Oval 61"/>
           <p:cNvSpPr/>
           <p:nvPr/>
         </p:nvSpPr>
@@ -58003,7 +57915,7 @@
       </p:sp>
       <p:sp>
         <p:nvSpPr>
-          <p:cNvPr id="65" name="Oval 64"/>
+          <p:cNvPr id="63" name="Oval 62"/>
           <p:cNvSpPr/>
           <p:nvPr/>
         </p:nvSpPr>
@@ -58049,7 +57961,7 @@
       </p:sp>
       <p:sp>
         <p:nvSpPr>
-          <p:cNvPr id="66" name="TextBox 65"/>
+          <p:cNvPr id="64" name="TextBox 63"/>
           <p:cNvSpPr txBox="1"/>
           <p:nvPr/>
         </p:nvSpPr>
@@ -58085,7 +57997,7 @@
       </p:sp>
       <p:sp>
         <p:nvSpPr>
-          <p:cNvPr id="67" name="Oval 66"/>
+          <p:cNvPr id="65" name="Oval 64"/>
           <p:cNvSpPr/>
           <p:nvPr/>
         </p:nvSpPr>
@@ -58131,7 +58043,7 @@
       </p:sp>
       <p:sp>
         <p:nvSpPr>
-          <p:cNvPr id="68" name="Oval 67"/>
+          <p:cNvPr id="66" name="Oval 65"/>
           <p:cNvSpPr/>
           <p:nvPr/>
         </p:nvSpPr>
@@ -58177,7 +58089,7 @@
       </p:sp>
       <p:sp>
         <p:nvSpPr>
-          <p:cNvPr id="69" name="TextBox 68"/>
+          <p:cNvPr id="67" name="TextBox 66"/>
           <p:cNvSpPr txBox="1"/>
           <p:nvPr/>
         </p:nvSpPr>
@@ -58213,7 +58125,7 @@
       </p:sp>
       <p:sp>
         <p:nvSpPr>
-          <p:cNvPr id="70" name="Oval 69"/>
+          <p:cNvPr id="68" name="Oval 67"/>
           <p:cNvSpPr/>
           <p:nvPr/>
         </p:nvSpPr>
@@ -58259,7 +58171,7 @@
       </p:sp>
       <p:sp>
         <p:nvSpPr>
-          <p:cNvPr id="71" name="TextBox 70"/>
+          <p:cNvPr id="69" name="TextBox 68"/>
           <p:cNvSpPr txBox="1"/>
           <p:nvPr/>
         </p:nvSpPr>
@@ -58295,7 +58207,7 @@
       </p:sp>
       <p:sp>
         <p:nvSpPr>
-          <p:cNvPr id="72" name="Oval 71"/>
+          <p:cNvPr id="70" name="Oval 69"/>
           <p:cNvSpPr/>
           <p:nvPr/>
         </p:nvSpPr>
@@ -58341,7 +58253,7 @@
       </p:sp>
       <p:sp>
         <p:nvSpPr>
-          <p:cNvPr id="73" name="Oval 72"/>
+          <p:cNvPr id="71" name="Oval 70"/>
           <p:cNvSpPr/>
           <p:nvPr/>
         </p:nvSpPr>
@@ -58387,7 +58299,7 @@
       </p:sp>
       <p:sp>
         <p:nvSpPr>
-          <p:cNvPr id="74" name="Oval 73"/>
+          <p:cNvPr id="72" name="Oval 71"/>
           <p:cNvSpPr/>
           <p:nvPr/>
         </p:nvSpPr>
@@ -58433,7 +58345,7 @@
       </p:sp>
       <p:sp>
         <p:nvSpPr>
-          <p:cNvPr id="75" name="Oval 74"/>
+          <p:cNvPr id="73" name="Oval 72"/>
           <p:cNvSpPr/>
           <p:nvPr/>
         </p:nvSpPr>
@@ -58479,7 +58391,7 @@
       </p:sp>
       <p:sp>
         <p:nvSpPr>
-          <p:cNvPr id="76" name="Oval 75"/>
+          <p:cNvPr id="74" name="Oval 73"/>
           <p:cNvSpPr/>
           <p:nvPr/>
         </p:nvSpPr>
@@ -58525,7 +58437,7 @@
       </p:sp>
       <p:sp>
         <p:nvSpPr>
-          <p:cNvPr id="77" name="Oval 76"/>
+          <p:cNvPr id="75" name="Oval 74"/>
           <p:cNvSpPr/>
           <p:nvPr/>
         </p:nvSpPr>
@@ -58571,7 +58483,7 @@
       </p:sp>
       <p:sp>
         <p:nvSpPr>
-          <p:cNvPr id="78" name="Oval 77"/>
+          <p:cNvPr id="76" name="Oval 75"/>
           <p:cNvSpPr/>
           <p:nvPr/>
         </p:nvSpPr>
@@ -58617,7 +58529,7 @@
       </p:sp>
       <p:sp>
         <p:nvSpPr>
-          <p:cNvPr id="79" name="TextBox 78"/>
+          <p:cNvPr id="77" name="TextBox 76"/>
           <p:cNvSpPr txBox="1"/>
           <p:nvPr/>
         </p:nvSpPr>
@@ -58653,7 +58565,7 @@
       </p:sp>
       <p:sp>
         <p:nvSpPr>
-          <p:cNvPr id="80" name="Oval 79"/>
+          <p:cNvPr id="78" name="Oval 77"/>
           <p:cNvSpPr/>
           <p:nvPr/>
         </p:nvSpPr>
@@ -58699,7 +58611,7 @@
       </p:sp>
       <p:sp>
         <p:nvSpPr>
-          <p:cNvPr id="81" name="Oval 80"/>
+          <p:cNvPr id="79" name="Oval 78"/>
           <p:cNvSpPr/>
           <p:nvPr/>
         </p:nvSpPr>
@@ -58745,7 +58657,7 @@
       </p:sp>
       <p:sp>
         <p:nvSpPr>
-          <p:cNvPr id="82" name="Oval 81"/>
+          <p:cNvPr id="80" name="Oval 79"/>
           <p:cNvSpPr/>
           <p:nvPr/>
         </p:nvSpPr>
@@ -58791,7 +58703,7 @@
       </p:sp>
       <p:sp>
         <p:nvSpPr>
-          <p:cNvPr id="83" name="TextBox 82"/>
+          <p:cNvPr id="81" name="TextBox 80"/>
           <p:cNvSpPr txBox="1"/>
           <p:nvPr/>
         </p:nvSpPr>
@@ -58827,7 +58739,7 @@
       </p:sp>
       <p:sp>
         <p:nvSpPr>
-          <p:cNvPr id="84" name="Oval 83"/>
+          <p:cNvPr id="82" name="Oval 81"/>
           <p:cNvSpPr/>
           <p:nvPr/>
         </p:nvSpPr>
@@ -58873,7 +58785,7 @@
       </p:sp>
       <p:sp>
         <p:nvSpPr>
-          <p:cNvPr id="85" name="TextBox 84"/>
+          <p:cNvPr id="83" name="TextBox 82"/>
           <p:cNvSpPr txBox="1"/>
           <p:nvPr/>
         </p:nvSpPr>
@@ -58909,7 +58821,7 @@
       </p:sp>
       <p:sp>
         <p:nvSpPr>
-          <p:cNvPr id="86" name="Oval 85"/>
+          <p:cNvPr id="84" name="Oval 83"/>
           <p:cNvSpPr/>
           <p:nvPr/>
         </p:nvSpPr>
@@ -58955,7 +58867,7 @@
       </p:sp>
       <p:sp>
         <p:nvSpPr>
-          <p:cNvPr id="87" name="TextBox 86"/>
+          <p:cNvPr id="85" name="TextBox 84"/>
           <p:cNvSpPr txBox="1"/>
           <p:nvPr/>
         </p:nvSpPr>
@@ -58991,7 +58903,7 @@
       </p:sp>
       <p:sp>
         <p:nvSpPr>
-          <p:cNvPr id="88" name="TextBox 87"/>
+          <p:cNvPr id="86" name="TextBox 85"/>
           <p:cNvSpPr txBox="1"/>
           <p:nvPr/>
         </p:nvSpPr>
@@ -59021,42 +58933,6 @@
                 <a:latin typeface="Arial"/>
               </a:rPr>
               <a:t>solid ellipse: 68 % CI</a:t>
-            </a:r>
-          </a:p>
-        </p:txBody>
-      </p:sp>
-      <p:sp>
-        <p:nvSpPr>
-          <p:cNvPr id="89" name="TextBox 88"/>
-          <p:cNvSpPr txBox="1"/>
-          <p:nvPr/>
-        </p:nvSpPr>
-        <p:spPr>
-          <a:xfrm>
-            <a:off x="3840480" y="1307592"/>
-            <a:ext cx="1554480" cy="137160"/>
-          </a:xfrm>
-          <a:prstGeom prst="rect">
-            <a:avLst/>
-          </a:prstGeom>
-          <a:noFill/>
-          <a:effectLst/>
-        </p:spPr>
-        <p:txBody>
-          <a:bodyPr wrap="square" lIns="0" rIns="0" tIns="0" bIns="0" anchor="ctr">
-            <a:spAutoFit/>
-          </a:bodyPr>
-          <a:lstStyle/>
-          <a:p>
-            <a:pPr algn="l"/>
-            <a:r>
-              <a:rPr sz="600" b="0" i="0">
-                <a:solidFill>
-                  <a:srgbClr val="555555"/>
-                </a:solidFill>
-                <a:latin typeface="Arial"/>
-              </a:rPr>
-              <a:t>thin ellipse: 95 % CI</a:t>
             </a:r>
           </a:p>
         </p:txBody>

--- a/260418_add/ppt/Fig5_nested_LASSO_native_editable.pptx
+++ b/260418_add/ppt/Fig5_nested_LASSO_native_editable.pptx
@@ -51336,7 +51336,7 @@
             <a:avLst/>
           </a:prstGeom>
           <a:solidFill>
-            <a:srgbClr val="C8DED8"/>
+            <a:srgbClr val="D8DCE2"/>
           </a:solidFill>
           <a:ln>
             <a:noFill/>
@@ -51380,7 +51380,7 @@
             <a:avLst/>
           </a:prstGeom>
           <a:solidFill>
-            <a:srgbClr val="C8DED8"/>
+            <a:srgbClr val="D8DCE2"/>
           </a:solidFill>
           <a:ln>
             <a:noFill/>
@@ -51424,7 +51424,7 @@
             <a:avLst/>
           </a:prstGeom>
           <a:solidFill>
-            <a:srgbClr val="C8DED8"/>
+            <a:srgbClr val="D8DCE2"/>
           </a:solidFill>
           <a:ln>
             <a:noFill/>
@@ -51468,7 +51468,7 @@
             <a:avLst/>
           </a:prstGeom>
           <a:solidFill>
-            <a:srgbClr val="C8DED8"/>
+            <a:srgbClr val="D8DCE2"/>
           </a:solidFill>
           <a:ln>
             <a:noFill/>
@@ -51512,7 +51512,7 @@
             <a:avLst/>
           </a:prstGeom>
           <a:solidFill>
-            <a:srgbClr val="C8DED8"/>
+            <a:srgbClr val="D8DCE2"/>
           </a:solidFill>
           <a:ln>
             <a:noFill/>
@@ -51556,7 +51556,7 @@
             <a:avLst/>
           </a:prstGeom>
           <a:solidFill>
-            <a:srgbClr val="C8DED8"/>
+            <a:srgbClr val="D8DCE2"/>
           </a:solidFill>
           <a:ln>
             <a:noFill/>
@@ -51600,7 +51600,7 @@
             <a:avLst/>
           </a:prstGeom>
           <a:solidFill>
-            <a:srgbClr val="C8DED8"/>
+            <a:srgbClr val="D8DCE2"/>
           </a:solidFill>
           <a:ln>
             <a:noFill/>
@@ -51644,7 +51644,7 @@
             <a:avLst/>
           </a:prstGeom>
           <a:solidFill>
-            <a:srgbClr val="C5DFD7"/>
+            <a:srgbClr val="9FC9BE"/>
           </a:solidFill>
           <a:ln>
             <a:noFill/>
@@ -51688,7 +51688,7 @@
             <a:avLst/>
           </a:prstGeom>
           <a:solidFill>
-            <a:srgbClr val="C5DFD7"/>
+            <a:srgbClr val="9FC9BE"/>
           </a:solidFill>
           <a:ln>
             <a:noFill/>
@@ -51732,7 +51732,7 @@
             <a:avLst/>
           </a:prstGeom>
           <a:solidFill>
-            <a:srgbClr val="C5DFD7"/>
+            <a:srgbClr val="9FC9BE"/>
           </a:solidFill>
           <a:ln>
             <a:noFill/>
@@ -51776,7 +51776,7 @@
             <a:avLst/>
           </a:prstGeom>
           <a:solidFill>
-            <a:srgbClr val="C5DFD7"/>
+            <a:srgbClr val="9FC9BE"/>
           </a:solidFill>
           <a:ln>
             <a:noFill/>
@@ -51820,7 +51820,7 @@
             <a:avLst/>
           </a:prstGeom>
           <a:solidFill>
-            <a:srgbClr val="C5DFD7"/>
+            <a:srgbClr val="9FC9BE"/>
           </a:solidFill>
           <a:ln>
             <a:noFill/>
@@ -51864,7 +51864,7 @@
             <a:avLst/>
           </a:prstGeom>
           <a:solidFill>
-            <a:srgbClr val="C5DFD7"/>
+            <a:srgbClr val="9FC9BE"/>
           </a:solidFill>
           <a:ln>
             <a:noFill/>
@@ -51908,7 +51908,7 @@
             <a:avLst/>
           </a:prstGeom>
           <a:solidFill>
-            <a:srgbClr val="C5DFD7"/>
+            <a:srgbClr val="9FC9BE"/>
           </a:solidFill>
           <a:ln>
             <a:noFill/>
@@ -51952,7 +51952,7 @@
             <a:avLst/>
           </a:prstGeom>
           <a:solidFill>
-            <a:srgbClr val="C5DFD7"/>
+            <a:srgbClr val="9FC9BE"/>
           </a:solidFill>
           <a:ln>
             <a:noFill/>
@@ -53330,7 +53330,7 @@
             <a:avLst/>
           </a:prstGeom>
           <a:solidFill>
-            <a:srgbClr val="C8DED8"/>
+            <a:srgbClr val="D8DCE2"/>
           </a:solidFill>
           <a:ln>
             <a:noFill/>
@@ -53410,7 +53410,7 @@
             <a:avLst/>
           </a:prstGeom>
           <a:solidFill>
-            <a:srgbClr val="C5DFD7"/>
+            <a:srgbClr val="9FC9BE"/>
           </a:solidFill>
           <a:ln>
             <a:noFill/>

--- a/260418_add/ppt/Fig5_nested_LASSO_native_editable.pptx
+++ b/260418_add/ppt/Fig5_nested_LASSO_native_editable.pptx
@@ -10,7 +10,6 @@
     <p:sldId id="258" r:id="rId9"/>
     <p:sldId id="259" r:id="rId10"/>
     <p:sldId id="260" r:id="rId11"/>
-    <p:sldId id="261" r:id="rId12"/>
   </p:sldIdLst>
   <p:sldSz cx="5943600" cy="4114800" type="screen4x3"/>
   <p:notesSz cx="6858000" cy="9144000"/>
@@ -67955,5084 +67954,6 @@
                 <a:latin typeface="Arial"/>
               </a:rPr>
               <a:t>feature value</a:t>
-            </a:r>
-          </a:p>
-        </p:txBody>
-      </p:sp>
-    </p:spTree>
-  </p:cSld>
-  <p:clrMapOvr>
-    <a:masterClrMapping/>
-  </p:clrMapOvr>
-</p:sld>
-</file>
-
-<file path=ppt/slides/slide6.xml><?xml version="1.0" encoding="utf-8"?>
-<p:sld xmlns:a="http://schemas.openxmlformats.org/drawingml/2006/main" xmlns:p="http://schemas.openxmlformats.org/presentationml/2006/main" xmlns:r="http://schemas.openxmlformats.org/officeDocument/2006/relationships">
-  <p:cSld>
-    <p:spTree>
-      <p:nvGrpSpPr>
-        <p:cNvPr id="1" name=""/>
-        <p:cNvGrpSpPr/>
-        <p:nvPr/>
-      </p:nvGrpSpPr>
-      <p:grpSpPr/>
-      <p:sp>
-        <p:nvSpPr>
-          <p:cNvPr id="2" name="TextBox 1"/>
-          <p:cNvSpPr txBox="1"/>
-          <p:nvPr/>
-        </p:nvSpPr>
-        <p:spPr>
-          <a:xfrm>
-            <a:off x="137160" y="91440"/>
-            <a:ext cx="365760" cy="320040"/>
-          </a:xfrm>
-          <a:prstGeom prst="rect">
-            <a:avLst/>
-          </a:prstGeom>
-          <a:noFill/>
-          <a:effectLst/>
-        </p:spPr>
-        <p:txBody>
-          <a:bodyPr wrap="square" lIns="0" rIns="0" tIns="0" bIns="0" anchor="ctr">
-            <a:spAutoFit/>
-          </a:bodyPr>
-          <a:lstStyle/>
-          <a:p>
-            <a:pPr algn="l"/>
-            <a:r>
-              <a:rPr sz="1400" b="1" i="0">
-                <a:solidFill>
-                  <a:srgbClr val="222222"/>
-                </a:solidFill>
-                <a:latin typeface="Arial"/>
-              </a:rPr>
-              <a:t>F</a:t>
-            </a:r>
-          </a:p>
-        </p:txBody>
-      </p:sp>
-      <p:cxnSp>
-        <p:nvCxnSpPr>
-          <p:cNvPr id="3" name="Connector 2"/>
-          <p:cNvCxnSpPr/>
-          <p:nvPr/>
-        </p:nvCxnSpPr>
-        <p:spPr>
-          <a:xfrm>
-            <a:off x="914400" y="3474720"/>
-            <a:ext cx="4206240" cy="0"/>
-          </a:xfrm>
-          <a:prstGeom prst="line">
-            <a:avLst/>
-          </a:prstGeom>
-          <a:ln w="7620">
-            <a:solidFill>
-              <a:srgbClr val="333333"/>
-            </a:solidFill>
-          </a:ln>
-          <a:effectLst/>
-        </p:spPr>
-        <p:style>
-          <a:lnRef idx="2">
-            <a:schemeClr val="accent1"/>
-          </a:lnRef>
-          <a:fillRef idx="0">
-            <a:schemeClr val="accent1"/>
-          </a:fillRef>
-          <a:effectRef idx="1">
-            <a:schemeClr val="accent1"/>
-          </a:effectRef>
-          <a:fontRef idx="minor">
-            <a:schemeClr val="tx1"/>
-          </a:fontRef>
-        </p:style>
-      </p:cxnSp>
-      <p:cxnSp>
-        <p:nvCxnSpPr>
-          <p:cNvPr id="4" name="Connector 3"/>
-          <p:cNvCxnSpPr/>
-          <p:nvPr/>
-        </p:nvCxnSpPr>
-        <p:spPr>
-          <a:xfrm>
-            <a:off x="914400" y="548640"/>
-            <a:ext cx="0" cy="2926080"/>
-          </a:xfrm>
-          <a:prstGeom prst="line">
-            <a:avLst/>
-          </a:prstGeom>
-          <a:ln w="7620">
-            <a:solidFill>
-              <a:srgbClr val="333333"/>
-            </a:solidFill>
-          </a:ln>
-          <a:effectLst/>
-        </p:spPr>
-        <p:style>
-          <a:lnRef idx="2">
-            <a:schemeClr val="accent1"/>
-          </a:lnRef>
-          <a:fillRef idx="0">
-            <a:schemeClr val="accent1"/>
-          </a:fillRef>
-          <a:effectRef idx="1">
-            <a:schemeClr val="accent1"/>
-          </a:effectRef>
-          <a:fontRef idx="minor">
-            <a:schemeClr val="tx1"/>
-          </a:fontRef>
-        </p:style>
-      </p:cxnSp>
-      <p:cxnSp>
-        <p:nvCxnSpPr>
-          <p:cNvPr id="5" name="Connector 4"/>
-          <p:cNvCxnSpPr/>
-          <p:nvPr/>
-        </p:nvCxnSpPr>
-        <p:spPr>
-          <a:xfrm>
-            <a:off x="874400" y="3474720"/>
-            <a:ext cx="40000" cy="0"/>
-          </a:xfrm>
-          <a:prstGeom prst="line">
-            <a:avLst/>
-          </a:prstGeom>
-          <a:ln w="6350">
-            <a:solidFill>
-              <a:srgbClr val="333333"/>
-            </a:solidFill>
-          </a:ln>
-          <a:effectLst/>
-        </p:spPr>
-        <p:style>
-          <a:lnRef idx="2">
-            <a:schemeClr val="accent1"/>
-          </a:lnRef>
-          <a:fillRef idx="0">
-            <a:schemeClr val="accent1"/>
-          </a:fillRef>
-          <a:effectRef idx="1">
-            <a:schemeClr val="accent1"/>
-          </a:effectRef>
-          <a:fontRef idx="minor">
-            <a:schemeClr val="tx1"/>
-          </a:fontRef>
-        </p:style>
-      </p:cxnSp>
-      <p:sp>
-        <p:nvSpPr>
-          <p:cNvPr id="6" name="TextBox 5"/>
-          <p:cNvSpPr txBox="1"/>
-          <p:nvPr/>
-        </p:nvSpPr>
-        <p:spPr>
-          <a:xfrm>
-            <a:off x="365760" y="3392424"/>
-            <a:ext cx="502920" cy="164592"/>
-          </a:xfrm>
-          <a:prstGeom prst="rect">
-            <a:avLst/>
-          </a:prstGeom>
-          <a:noFill/>
-          <a:effectLst/>
-        </p:spPr>
-        <p:txBody>
-          <a:bodyPr wrap="square" lIns="0" rIns="0" tIns="0" bIns="0" anchor="ctr">
-            <a:spAutoFit/>
-          </a:bodyPr>
-          <a:lstStyle/>
-          <a:p>
-            <a:pPr algn="r"/>
-            <a:r>
-              <a:rPr sz="700" b="0" i="0">
-                <a:solidFill>
-                  <a:srgbClr val="222222"/>
-                </a:solidFill>
-                <a:latin typeface="Arial"/>
-              </a:rPr>
-              <a:t>0.0</a:t>
-            </a:r>
-          </a:p>
-        </p:txBody>
-      </p:sp>
-      <p:cxnSp>
-        <p:nvCxnSpPr>
-          <p:cNvPr id="7" name="Connector 6"/>
-          <p:cNvCxnSpPr/>
-          <p:nvPr/>
-        </p:nvCxnSpPr>
-        <p:spPr>
-          <a:xfrm>
-            <a:off x="874400" y="2889504"/>
-            <a:ext cx="40000" cy="0"/>
-          </a:xfrm>
-          <a:prstGeom prst="line">
-            <a:avLst/>
-          </a:prstGeom>
-          <a:ln w="6350">
-            <a:solidFill>
-              <a:srgbClr val="333333"/>
-            </a:solidFill>
-          </a:ln>
-          <a:effectLst/>
-        </p:spPr>
-        <p:style>
-          <a:lnRef idx="2">
-            <a:schemeClr val="accent1"/>
-          </a:lnRef>
-          <a:fillRef idx="0">
-            <a:schemeClr val="accent1"/>
-          </a:fillRef>
-          <a:effectRef idx="1">
-            <a:schemeClr val="accent1"/>
-          </a:effectRef>
-          <a:fontRef idx="minor">
-            <a:schemeClr val="tx1"/>
-          </a:fontRef>
-        </p:style>
-      </p:cxnSp>
-      <p:sp>
-        <p:nvSpPr>
-          <p:cNvPr id="8" name="TextBox 7"/>
-          <p:cNvSpPr txBox="1"/>
-          <p:nvPr/>
-        </p:nvSpPr>
-        <p:spPr>
-          <a:xfrm>
-            <a:off x="365760" y="2807208"/>
-            <a:ext cx="502920" cy="164592"/>
-          </a:xfrm>
-          <a:prstGeom prst="rect">
-            <a:avLst/>
-          </a:prstGeom>
-          <a:noFill/>
-          <a:effectLst/>
-        </p:spPr>
-        <p:txBody>
-          <a:bodyPr wrap="square" lIns="0" rIns="0" tIns="0" bIns="0" anchor="ctr">
-            <a:spAutoFit/>
-          </a:bodyPr>
-          <a:lstStyle/>
-          <a:p>
-            <a:pPr algn="r"/>
-            <a:r>
-              <a:rPr sz="700" b="0" i="0">
-                <a:solidFill>
-                  <a:srgbClr val="222222"/>
-                </a:solidFill>
-                <a:latin typeface="Arial"/>
-              </a:rPr>
-              <a:t>0.2</a:t>
-            </a:r>
-          </a:p>
-        </p:txBody>
-      </p:sp>
-      <p:cxnSp>
-        <p:nvCxnSpPr>
-          <p:cNvPr id="9" name="Connector 8"/>
-          <p:cNvCxnSpPr/>
-          <p:nvPr/>
-        </p:nvCxnSpPr>
-        <p:spPr>
-          <a:xfrm>
-            <a:off x="874400" y="2304288"/>
-            <a:ext cx="40000" cy="0"/>
-          </a:xfrm>
-          <a:prstGeom prst="line">
-            <a:avLst/>
-          </a:prstGeom>
-          <a:ln w="6350">
-            <a:solidFill>
-              <a:srgbClr val="333333"/>
-            </a:solidFill>
-          </a:ln>
-          <a:effectLst/>
-        </p:spPr>
-        <p:style>
-          <a:lnRef idx="2">
-            <a:schemeClr val="accent1"/>
-          </a:lnRef>
-          <a:fillRef idx="0">
-            <a:schemeClr val="accent1"/>
-          </a:fillRef>
-          <a:effectRef idx="1">
-            <a:schemeClr val="accent1"/>
-          </a:effectRef>
-          <a:fontRef idx="minor">
-            <a:schemeClr val="tx1"/>
-          </a:fontRef>
-        </p:style>
-      </p:cxnSp>
-      <p:sp>
-        <p:nvSpPr>
-          <p:cNvPr id="10" name="TextBox 9"/>
-          <p:cNvSpPr txBox="1"/>
-          <p:nvPr/>
-        </p:nvSpPr>
-        <p:spPr>
-          <a:xfrm>
-            <a:off x="365760" y="2221992"/>
-            <a:ext cx="502920" cy="164592"/>
-          </a:xfrm>
-          <a:prstGeom prst="rect">
-            <a:avLst/>
-          </a:prstGeom>
-          <a:noFill/>
-          <a:effectLst/>
-        </p:spPr>
-        <p:txBody>
-          <a:bodyPr wrap="square" lIns="0" rIns="0" tIns="0" bIns="0" anchor="ctr">
-            <a:spAutoFit/>
-          </a:bodyPr>
-          <a:lstStyle/>
-          <a:p>
-            <a:pPr algn="r"/>
-            <a:r>
-              <a:rPr sz="700" b="0" i="0">
-                <a:solidFill>
-                  <a:srgbClr val="222222"/>
-                </a:solidFill>
-                <a:latin typeface="Arial"/>
-              </a:rPr>
-              <a:t>0.4</a:t>
-            </a:r>
-          </a:p>
-        </p:txBody>
-      </p:sp>
-      <p:cxnSp>
-        <p:nvCxnSpPr>
-          <p:cNvPr id="11" name="Connector 10"/>
-          <p:cNvCxnSpPr/>
-          <p:nvPr/>
-        </p:nvCxnSpPr>
-        <p:spPr>
-          <a:xfrm>
-            <a:off x="874400" y="2011680"/>
-            <a:ext cx="40000" cy="0"/>
-          </a:xfrm>
-          <a:prstGeom prst="line">
-            <a:avLst/>
-          </a:prstGeom>
-          <a:ln w="6350">
-            <a:solidFill>
-              <a:srgbClr val="333333"/>
-            </a:solidFill>
-          </a:ln>
-          <a:effectLst/>
-        </p:spPr>
-        <p:style>
-          <a:lnRef idx="2">
-            <a:schemeClr val="accent1"/>
-          </a:lnRef>
-          <a:fillRef idx="0">
-            <a:schemeClr val="accent1"/>
-          </a:fillRef>
-          <a:effectRef idx="1">
-            <a:schemeClr val="accent1"/>
-          </a:effectRef>
-          <a:fontRef idx="minor">
-            <a:schemeClr val="tx1"/>
-          </a:fontRef>
-        </p:style>
-      </p:cxnSp>
-      <p:sp>
-        <p:nvSpPr>
-          <p:cNvPr id="12" name="TextBox 11"/>
-          <p:cNvSpPr txBox="1"/>
-          <p:nvPr/>
-        </p:nvSpPr>
-        <p:spPr>
-          <a:xfrm>
-            <a:off x="365760" y="1929384"/>
-            <a:ext cx="502920" cy="164592"/>
-          </a:xfrm>
-          <a:prstGeom prst="rect">
-            <a:avLst/>
-          </a:prstGeom>
-          <a:noFill/>
-          <a:effectLst/>
-        </p:spPr>
-        <p:txBody>
-          <a:bodyPr wrap="square" lIns="0" rIns="0" tIns="0" bIns="0" anchor="ctr">
-            <a:spAutoFit/>
-          </a:bodyPr>
-          <a:lstStyle/>
-          <a:p>
-            <a:pPr algn="r"/>
-            <a:r>
-              <a:rPr sz="700" b="0" i="0">
-                <a:solidFill>
-                  <a:srgbClr val="222222"/>
-                </a:solidFill>
-                <a:latin typeface="Arial"/>
-              </a:rPr>
-              <a:t>0.5</a:t>
-            </a:r>
-          </a:p>
-        </p:txBody>
-      </p:sp>
-      <p:cxnSp>
-        <p:nvCxnSpPr>
-          <p:cNvPr id="13" name="Connector 12"/>
-          <p:cNvCxnSpPr/>
-          <p:nvPr/>
-        </p:nvCxnSpPr>
-        <p:spPr>
-          <a:xfrm>
-            <a:off x="874400" y="1719072"/>
-            <a:ext cx="40000" cy="0"/>
-          </a:xfrm>
-          <a:prstGeom prst="line">
-            <a:avLst/>
-          </a:prstGeom>
-          <a:ln w="6350">
-            <a:solidFill>
-              <a:srgbClr val="333333"/>
-            </a:solidFill>
-          </a:ln>
-          <a:effectLst/>
-        </p:spPr>
-        <p:style>
-          <a:lnRef idx="2">
-            <a:schemeClr val="accent1"/>
-          </a:lnRef>
-          <a:fillRef idx="0">
-            <a:schemeClr val="accent1"/>
-          </a:fillRef>
-          <a:effectRef idx="1">
-            <a:schemeClr val="accent1"/>
-          </a:effectRef>
-          <a:fontRef idx="minor">
-            <a:schemeClr val="tx1"/>
-          </a:fontRef>
-        </p:style>
-      </p:cxnSp>
-      <p:sp>
-        <p:nvSpPr>
-          <p:cNvPr id="14" name="TextBox 13"/>
-          <p:cNvSpPr txBox="1"/>
-          <p:nvPr/>
-        </p:nvSpPr>
-        <p:spPr>
-          <a:xfrm>
-            <a:off x="365760" y="1636776"/>
-            <a:ext cx="502920" cy="164592"/>
-          </a:xfrm>
-          <a:prstGeom prst="rect">
-            <a:avLst/>
-          </a:prstGeom>
-          <a:noFill/>
-          <a:effectLst/>
-        </p:spPr>
-        <p:txBody>
-          <a:bodyPr wrap="square" lIns="0" rIns="0" tIns="0" bIns="0" anchor="ctr">
-            <a:spAutoFit/>
-          </a:bodyPr>
-          <a:lstStyle/>
-          <a:p>
-            <a:pPr algn="r"/>
-            <a:r>
-              <a:rPr sz="700" b="0" i="0">
-                <a:solidFill>
-                  <a:srgbClr val="222222"/>
-                </a:solidFill>
-                <a:latin typeface="Arial"/>
-              </a:rPr>
-              <a:t>0.6</a:t>
-            </a:r>
-          </a:p>
-        </p:txBody>
-      </p:sp>
-      <p:cxnSp>
-        <p:nvCxnSpPr>
-          <p:cNvPr id="15" name="Connector 14"/>
-          <p:cNvCxnSpPr/>
-          <p:nvPr/>
-        </p:nvCxnSpPr>
-        <p:spPr>
-          <a:xfrm>
-            <a:off x="874400" y="1133856"/>
-            <a:ext cx="40000" cy="0"/>
-          </a:xfrm>
-          <a:prstGeom prst="line">
-            <a:avLst/>
-          </a:prstGeom>
-          <a:ln w="6350">
-            <a:solidFill>
-              <a:srgbClr val="333333"/>
-            </a:solidFill>
-          </a:ln>
-          <a:effectLst/>
-        </p:spPr>
-        <p:style>
-          <a:lnRef idx="2">
-            <a:schemeClr val="accent1"/>
-          </a:lnRef>
-          <a:fillRef idx="0">
-            <a:schemeClr val="accent1"/>
-          </a:fillRef>
-          <a:effectRef idx="1">
-            <a:schemeClr val="accent1"/>
-          </a:effectRef>
-          <a:fontRef idx="minor">
-            <a:schemeClr val="tx1"/>
-          </a:fontRef>
-        </p:style>
-      </p:cxnSp>
-      <p:sp>
-        <p:nvSpPr>
-          <p:cNvPr id="16" name="TextBox 15"/>
-          <p:cNvSpPr txBox="1"/>
-          <p:nvPr/>
-        </p:nvSpPr>
-        <p:spPr>
-          <a:xfrm>
-            <a:off x="365760" y="1051560"/>
-            <a:ext cx="502920" cy="164592"/>
-          </a:xfrm>
-          <a:prstGeom prst="rect">
-            <a:avLst/>
-          </a:prstGeom>
-          <a:noFill/>
-          <a:effectLst/>
-        </p:spPr>
-        <p:txBody>
-          <a:bodyPr wrap="square" lIns="0" rIns="0" tIns="0" bIns="0" anchor="ctr">
-            <a:spAutoFit/>
-          </a:bodyPr>
-          <a:lstStyle/>
-          <a:p>
-            <a:pPr algn="r"/>
-            <a:r>
-              <a:rPr sz="700" b="0" i="0">
-                <a:solidFill>
-                  <a:srgbClr val="222222"/>
-                </a:solidFill>
-                <a:latin typeface="Arial"/>
-              </a:rPr>
-              <a:t>0.8</a:t>
-            </a:r>
-          </a:p>
-        </p:txBody>
-      </p:sp>
-      <p:cxnSp>
-        <p:nvCxnSpPr>
-          <p:cNvPr id="17" name="Connector 16"/>
-          <p:cNvCxnSpPr/>
-          <p:nvPr/>
-        </p:nvCxnSpPr>
-        <p:spPr>
-          <a:xfrm>
-            <a:off x="874400" y="548640"/>
-            <a:ext cx="40000" cy="0"/>
-          </a:xfrm>
-          <a:prstGeom prst="line">
-            <a:avLst/>
-          </a:prstGeom>
-          <a:ln w="6350">
-            <a:solidFill>
-              <a:srgbClr val="333333"/>
-            </a:solidFill>
-          </a:ln>
-          <a:effectLst/>
-        </p:spPr>
-        <p:style>
-          <a:lnRef idx="2">
-            <a:schemeClr val="accent1"/>
-          </a:lnRef>
-          <a:fillRef idx="0">
-            <a:schemeClr val="accent1"/>
-          </a:fillRef>
-          <a:effectRef idx="1">
-            <a:schemeClr val="accent1"/>
-          </a:effectRef>
-          <a:fontRef idx="minor">
-            <a:schemeClr val="tx1"/>
-          </a:fontRef>
-        </p:style>
-      </p:cxnSp>
-      <p:sp>
-        <p:nvSpPr>
-          <p:cNvPr id="18" name="TextBox 17"/>
-          <p:cNvSpPr txBox="1"/>
-          <p:nvPr/>
-        </p:nvSpPr>
-        <p:spPr>
-          <a:xfrm>
-            <a:off x="365760" y="466344"/>
-            <a:ext cx="502920" cy="164592"/>
-          </a:xfrm>
-          <a:prstGeom prst="rect">
-            <a:avLst/>
-          </a:prstGeom>
-          <a:noFill/>
-          <a:effectLst/>
-        </p:spPr>
-        <p:txBody>
-          <a:bodyPr wrap="square" lIns="0" rIns="0" tIns="0" bIns="0" anchor="ctr">
-            <a:spAutoFit/>
-          </a:bodyPr>
-          <a:lstStyle/>
-          <a:p>
-            <a:pPr algn="r"/>
-            <a:r>
-              <a:rPr sz="700" b="0" i="0">
-                <a:solidFill>
-                  <a:srgbClr val="222222"/>
-                </a:solidFill>
-                <a:latin typeface="Arial"/>
-              </a:rPr>
-              <a:t>1.0</a:t>
-            </a:r>
-          </a:p>
-        </p:txBody>
-      </p:sp>
-      <p:sp>
-        <p:nvSpPr>
-          <p:cNvPr id="19" name="TextBox 18"/>
-          <p:cNvSpPr txBox="1"/>
-          <p:nvPr/>
-        </p:nvSpPr>
-        <p:spPr>
-          <a:xfrm>
-            <a:off x="914400" y="3767328"/>
-            <a:ext cx="4206240" cy="201168"/>
-          </a:xfrm>
-          <a:prstGeom prst="rect">
-            <a:avLst/>
-          </a:prstGeom>
-          <a:noFill/>
-          <a:effectLst/>
-        </p:spPr>
-        <p:txBody>
-          <a:bodyPr wrap="square" lIns="0" rIns="0" tIns="0" bIns="0" anchor="ctr">
-            <a:spAutoFit/>
-          </a:bodyPr>
-          <a:lstStyle/>
-          <a:p>
-            <a:pPr algn="ctr"/>
-            <a:r>
-              <a:rPr sz="900" b="0" i="0">
-                <a:solidFill>
-                  <a:srgbClr val="222222"/>
-                </a:solidFill>
-                <a:latin typeface="Arial"/>
-              </a:rPr>
-              <a:t>Subjects, ordered by predicted probability</a:t>
-            </a:r>
-          </a:p>
-        </p:txBody>
-      </p:sp>
-      <p:sp>
-        <p:nvSpPr>
-          <p:cNvPr id="20" name="TextBox 19"/>
-          <p:cNvSpPr txBox="1"/>
-          <p:nvPr/>
-        </p:nvSpPr>
-        <p:spPr>
-          <a:xfrm rot="16200000">
-            <a:off x="45720" y="1463040"/>
-            <a:ext cx="777240" cy="1097280"/>
-          </a:xfrm>
-          <a:prstGeom prst="rect">
-            <a:avLst/>
-          </a:prstGeom>
-          <a:noFill/>
-          <a:effectLst/>
-        </p:spPr>
-        <p:txBody>
-          <a:bodyPr wrap="square" lIns="0" rIns="0" tIns="0" bIns="0" anchor="ctr">
-            <a:spAutoFit/>
-          </a:bodyPr>
-          <a:lstStyle/>
-          <a:p>
-            <a:pPr algn="ctr"/>
-            <a:r>
-              <a:rPr sz="900" b="0" i="0">
-                <a:solidFill>
-                  <a:srgbClr val="222222"/>
-                </a:solidFill>
-                <a:latin typeface="Arial"/>
-              </a:rPr>
-              <a:t>Predicted P(good)</a:t>
-            </a:r>
-          </a:p>
-        </p:txBody>
-      </p:sp>
-      <p:cxnSp>
-        <p:nvCxnSpPr>
-          <p:cNvPr id="21" name="Connector 20"/>
-          <p:cNvCxnSpPr/>
-          <p:nvPr/>
-        </p:nvCxnSpPr>
-        <p:spPr>
-          <a:xfrm>
-            <a:off x="914400" y="2011680"/>
-            <a:ext cx="4206240" cy="0"/>
-          </a:xfrm>
-          <a:prstGeom prst="line">
-            <a:avLst/>
-          </a:prstGeom>
-          <a:ln w="7620">
-            <a:solidFill>
-              <a:srgbClr val="222222"/>
-            </a:solidFill>
-          </a:ln>
-          <a:effectLst/>
-        </p:spPr>
-        <p:style>
-          <a:lnRef idx="2">
-            <a:schemeClr val="accent1"/>
-          </a:lnRef>
-          <a:fillRef idx="0">
-            <a:schemeClr val="accent1"/>
-          </a:fillRef>
-          <a:effectRef idx="1">
-            <a:schemeClr val="accent1"/>
-          </a:effectRef>
-          <a:fontRef idx="minor">
-            <a:schemeClr val="tx1"/>
-          </a:fontRef>
-        </p:style>
-      </p:cxnSp>
-      <p:sp>
-        <p:nvSpPr>
-          <p:cNvPr id="22" name="TextBox 21"/>
-          <p:cNvSpPr txBox="1"/>
-          <p:nvPr/>
-        </p:nvSpPr>
-        <p:spPr>
-          <a:xfrm>
-            <a:off x="5140640" y="1920240"/>
-            <a:ext cx="731520" cy="182880"/>
-          </a:xfrm>
-          <a:prstGeom prst="rect">
-            <a:avLst/>
-          </a:prstGeom>
-          <a:noFill/>
-          <a:effectLst/>
-        </p:spPr>
-        <p:txBody>
-          <a:bodyPr wrap="square" lIns="0" rIns="0" tIns="0" bIns="0" anchor="ctr">
-            <a:spAutoFit/>
-          </a:bodyPr>
-          <a:lstStyle/>
-          <a:p>
-            <a:pPr algn="l"/>
-            <a:r>
-              <a:rPr sz="700" b="0" i="0">
-                <a:solidFill>
-                  <a:srgbClr val="222222"/>
-                </a:solidFill>
-                <a:latin typeface="Arial"/>
-              </a:rPr>
-              <a:t>0.5 threshold</a:t>
-            </a:r>
-          </a:p>
-        </p:txBody>
-      </p:sp>
-      <p:sp>
-        <p:nvSpPr>
-          <p:cNvPr id="23" name="Rectangle 22"/>
-          <p:cNvSpPr/>
-          <p:nvPr/>
-        </p:nvSpPr>
-        <p:spPr>
-          <a:xfrm>
-            <a:off x="925216" y="2758576"/>
-            <a:ext cx="98546" cy="716144"/>
-          </a:xfrm>
-          <a:prstGeom prst="rect">
-            <a:avLst/>
-          </a:prstGeom>
-          <a:solidFill>
-            <a:srgbClr val="C53E1F"/>
-          </a:solidFill>
-          <a:ln w="2540">
-            <a:solidFill>
-              <a:srgbClr val="FFFFFF"/>
-            </a:solidFill>
-          </a:ln>
-          <a:effectLst/>
-        </p:spPr>
-        <p:style>
-          <a:lnRef idx="1">
-            <a:schemeClr val="accent1"/>
-          </a:lnRef>
-          <a:fillRef idx="3">
-            <a:schemeClr val="accent1"/>
-          </a:fillRef>
-          <a:effectRef idx="2">
-            <a:schemeClr val="accent1"/>
-          </a:effectRef>
-          <a:fontRef idx="minor">
-            <a:schemeClr val="lt1"/>
-          </a:fontRef>
-        </p:style>
-        <p:txBody>
-          <a:bodyPr rtlCol="0" anchor="ctr"/>
-          <a:lstStyle/>
-          <a:p>
-            <a:pPr algn="ctr"/>
-          </a:p>
-        </p:txBody>
-      </p:sp>
-      <p:sp>
-        <p:nvSpPr>
-          <p:cNvPr id="24" name="TextBox 23"/>
-          <p:cNvSpPr txBox="1"/>
-          <p:nvPr/>
-        </p:nvSpPr>
-        <p:spPr>
-          <a:xfrm>
-            <a:off x="864761" y="3493008"/>
-            <a:ext cx="219456" cy="109728"/>
-          </a:xfrm>
-          <a:prstGeom prst="rect">
-            <a:avLst/>
-          </a:prstGeom>
-          <a:noFill/>
-          <a:effectLst/>
-        </p:spPr>
-        <p:txBody>
-          <a:bodyPr wrap="square" lIns="0" rIns="0" tIns="0" bIns="0" anchor="ctr">
-            <a:spAutoFit/>
-          </a:bodyPr>
-          <a:lstStyle/>
-          <a:p>
-            <a:pPr algn="ctr"/>
-            <a:r>
-              <a:rPr sz="400" b="0" i="0">
-                <a:solidFill>
-                  <a:srgbClr val="C53E1F"/>
-                </a:solidFill>
-                <a:latin typeface="Arial"/>
-              </a:rPr>
-              <a:t>35</a:t>
-            </a:r>
-          </a:p>
-        </p:txBody>
-      </p:sp>
-      <p:sp>
-        <p:nvSpPr>
-          <p:cNvPr id="25" name="Rectangle 24"/>
-          <p:cNvSpPr/>
-          <p:nvPr/>
-        </p:nvSpPr>
-        <p:spPr>
-          <a:xfrm>
-            <a:off x="1045394" y="2753829"/>
-            <a:ext cx="98546" cy="720891"/>
-          </a:xfrm>
-          <a:prstGeom prst="rect">
-            <a:avLst/>
-          </a:prstGeom>
-          <a:solidFill>
-            <a:srgbClr val="C53E1F"/>
-          </a:solidFill>
-          <a:ln w="2540">
-            <a:solidFill>
-              <a:srgbClr val="FFFFFF"/>
-            </a:solidFill>
-          </a:ln>
-          <a:effectLst/>
-        </p:spPr>
-        <p:style>
-          <a:lnRef idx="1">
-            <a:schemeClr val="accent1"/>
-          </a:lnRef>
-          <a:fillRef idx="3">
-            <a:schemeClr val="accent1"/>
-          </a:fillRef>
-          <a:effectRef idx="2">
-            <a:schemeClr val="accent1"/>
-          </a:effectRef>
-          <a:fontRef idx="minor">
-            <a:schemeClr val="lt1"/>
-          </a:fontRef>
-        </p:style>
-        <p:txBody>
-          <a:bodyPr rtlCol="0" anchor="ctr"/>
-          <a:lstStyle/>
-          <a:p>
-            <a:pPr algn="ctr"/>
-          </a:p>
-        </p:txBody>
-      </p:sp>
-      <p:sp>
-        <p:nvSpPr>
-          <p:cNvPr id="26" name="TextBox 25"/>
-          <p:cNvSpPr txBox="1"/>
-          <p:nvPr/>
-        </p:nvSpPr>
-        <p:spPr>
-          <a:xfrm>
-            <a:off x="984939" y="3493008"/>
-            <a:ext cx="219456" cy="109728"/>
-          </a:xfrm>
-          <a:prstGeom prst="rect">
-            <a:avLst/>
-          </a:prstGeom>
-          <a:noFill/>
-          <a:effectLst/>
-        </p:spPr>
-        <p:txBody>
-          <a:bodyPr wrap="square" lIns="0" rIns="0" tIns="0" bIns="0" anchor="ctr">
-            <a:spAutoFit/>
-          </a:bodyPr>
-          <a:lstStyle/>
-          <a:p>
-            <a:pPr algn="ctr"/>
-            <a:r>
-              <a:rPr sz="400" b="0" i="0">
-                <a:solidFill>
-                  <a:srgbClr val="C53E1F"/>
-                </a:solidFill>
-                <a:latin typeface="Arial"/>
-              </a:rPr>
-              <a:t>19</a:t>
-            </a:r>
-          </a:p>
-        </p:txBody>
-      </p:sp>
-      <p:sp>
-        <p:nvSpPr>
-          <p:cNvPr id="27" name="Rectangle 26"/>
-          <p:cNvSpPr/>
-          <p:nvPr/>
-        </p:nvSpPr>
-        <p:spPr>
-          <a:xfrm>
-            <a:off x="1165572" y="2621041"/>
-            <a:ext cx="98546" cy="853679"/>
-          </a:xfrm>
-          <a:prstGeom prst="rect">
-            <a:avLst/>
-          </a:prstGeom>
-          <a:solidFill>
-            <a:srgbClr val="C53E1F"/>
-          </a:solidFill>
-          <a:ln w="2540">
-            <a:solidFill>
-              <a:srgbClr val="FFFFFF"/>
-            </a:solidFill>
-          </a:ln>
-          <a:effectLst/>
-        </p:spPr>
-        <p:style>
-          <a:lnRef idx="1">
-            <a:schemeClr val="accent1"/>
-          </a:lnRef>
-          <a:fillRef idx="3">
-            <a:schemeClr val="accent1"/>
-          </a:fillRef>
-          <a:effectRef idx="2">
-            <a:schemeClr val="accent1"/>
-          </a:effectRef>
-          <a:fontRef idx="minor">
-            <a:schemeClr val="lt1"/>
-          </a:fontRef>
-        </p:style>
-        <p:txBody>
-          <a:bodyPr rtlCol="0" anchor="ctr"/>
-          <a:lstStyle/>
-          <a:p>
-            <a:pPr algn="ctr"/>
-          </a:p>
-        </p:txBody>
-      </p:sp>
-      <p:sp>
-        <p:nvSpPr>
-          <p:cNvPr id="28" name="TextBox 27"/>
-          <p:cNvSpPr txBox="1"/>
-          <p:nvPr/>
-        </p:nvSpPr>
-        <p:spPr>
-          <a:xfrm>
-            <a:off x="1105117" y="3493008"/>
-            <a:ext cx="219456" cy="109728"/>
-          </a:xfrm>
-          <a:prstGeom prst="rect">
-            <a:avLst/>
-          </a:prstGeom>
-          <a:noFill/>
-          <a:effectLst/>
-        </p:spPr>
-        <p:txBody>
-          <a:bodyPr wrap="square" lIns="0" rIns="0" tIns="0" bIns="0" anchor="ctr">
-            <a:spAutoFit/>
-          </a:bodyPr>
-          <a:lstStyle/>
-          <a:p>
-            <a:pPr algn="ctr"/>
-            <a:r>
-              <a:rPr sz="400" b="0" i="0">
-                <a:solidFill>
-                  <a:srgbClr val="C53E1F"/>
-                </a:solidFill>
-                <a:latin typeface="Arial"/>
-              </a:rPr>
-              <a:t>15</a:t>
-            </a:r>
-          </a:p>
-        </p:txBody>
-      </p:sp>
-      <p:sp>
-        <p:nvSpPr>
-          <p:cNvPr id="29" name="Rectangle 28"/>
-          <p:cNvSpPr/>
-          <p:nvPr/>
-        </p:nvSpPr>
-        <p:spPr>
-          <a:xfrm>
-            <a:off x="1285751" y="2602061"/>
-            <a:ext cx="98546" cy="872659"/>
-          </a:xfrm>
-          <a:prstGeom prst="rect">
-            <a:avLst/>
-          </a:prstGeom>
-          <a:solidFill>
-            <a:srgbClr val="0A7D6E"/>
-          </a:solidFill>
-          <a:ln w="2540">
-            <a:solidFill>
-              <a:srgbClr val="FFFFFF"/>
-            </a:solidFill>
-          </a:ln>
-          <a:effectLst/>
-        </p:spPr>
-        <p:style>
-          <a:lnRef idx="1">
-            <a:schemeClr val="accent1"/>
-          </a:lnRef>
-          <a:fillRef idx="3">
-            <a:schemeClr val="accent1"/>
-          </a:fillRef>
-          <a:effectRef idx="2">
-            <a:schemeClr val="accent1"/>
-          </a:effectRef>
-          <a:fontRef idx="minor">
-            <a:schemeClr val="lt1"/>
-          </a:fontRef>
-        </p:style>
-        <p:txBody>
-          <a:bodyPr rtlCol="0" anchor="ctr"/>
-          <a:lstStyle/>
-          <a:p>
-            <a:pPr algn="ctr"/>
-          </a:p>
-        </p:txBody>
-      </p:sp>
-      <p:sp>
-        <p:nvSpPr>
-          <p:cNvPr id="30" name="Rectangle 29"/>
-          <p:cNvSpPr/>
-          <p:nvPr/>
-        </p:nvSpPr>
-        <p:spPr>
-          <a:xfrm>
-            <a:off x="1285751" y="2602061"/>
-            <a:ext cx="98546" cy="872659"/>
-          </a:xfrm>
-          <a:prstGeom prst="rect">
-            <a:avLst/>
-          </a:prstGeom>
-          <a:noFill/>
-          <a:ln w="16510">
-            <a:solidFill>
-              <a:srgbClr val="D4A300"/>
-            </a:solidFill>
-          </a:ln>
-          <a:effectLst/>
-        </p:spPr>
-        <p:style>
-          <a:lnRef idx="1">
-            <a:schemeClr val="accent1"/>
-          </a:lnRef>
-          <a:fillRef idx="3">
-            <a:schemeClr val="accent1"/>
-          </a:fillRef>
-          <a:effectRef idx="2">
-            <a:schemeClr val="accent1"/>
-          </a:effectRef>
-          <a:fontRef idx="minor">
-            <a:schemeClr val="lt1"/>
-          </a:fontRef>
-        </p:style>
-        <p:txBody>
-          <a:bodyPr rtlCol="0" anchor="ctr"/>
-          <a:lstStyle/>
-          <a:p>
-            <a:pPr algn="ctr"/>
-          </a:p>
-        </p:txBody>
-      </p:sp>
-      <p:sp>
-        <p:nvSpPr>
-          <p:cNvPr id="31" name="TextBox 30"/>
-          <p:cNvSpPr txBox="1"/>
-          <p:nvPr/>
-        </p:nvSpPr>
-        <p:spPr>
-          <a:xfrm>
-            <a:off x="1261872" y="2455757"/>
-            <a:ext cx="146304" cy="128016"/>
-          </a:xfrm>
-          <a:prstGeom prst="rect">
-            <a:avLst/>
-          </a:prstGeom>
-          <a:noFill/>
-          <a:effectLst/>
-        </p:spPr>
-        <p:txBody>
-          <a:bodyPr wrap="square" lIns="0" rIns="0" tIns="0" bIns="0" anchor="ctr">
-            <a:spAutoFit/>
-          </a:bodyPr>
-          <a:lstStyle/>
-          <a:p>
-            <a:pPr algn="ctr"/>
-            <a:r>
-              <a:rPr sz="1000" b="1" i="0">
-                <a:solidFill>
-                  <a:srgbClr val="D4A300"/>
-                </a:solidFill>
-                <a:latin typeface="Arial"/>
-              </a:rPr>
-              <a:t>✗</a:t>
-            </a:r>
-          </a:p>
-        </p:txBody>
-      </p:sp>
-      <p:sp>
-        <p:nvSpPr>
-          <p:cNvPr id="32" name="TextBox 31"/>
-          <p:cNvSpPr txBox="1"/>
-          <p:nvPr/>
-        </p:nvSpPr>
-        <p:spPr>
-          <a:xfrm>
-            <a:off x="1225296" y="3493008"/>
-            <a:ext cx="219456" cy="109728"/>
-          </a:xfrm>
-          <a:prstGeom prst="rect">
-            <a:avLst/>
-          </a:prstGeom>
-          <a:noFill/>
-          <a:effectLst/>
-        </p:spPr>
-        <p:txBody>
-          <a:bodyPr wrap="square" lIns="0" rIns="0" tIns="0" bIns="0" anchor="ctr">
-            <a:spAutoFit/>
-          </a:bodyPr>
-          <a:lstStyle/>
-          <a:p>
-            <a:pPr algn="ctr"/>
-            <a:r>
-              <a:rPr sz="400" b="0" i="0">
-                <a:solidFill>
-                  <a:srgbClr val="0A7D6E"/>
-                </a:solidFill>
-                <a:latin typeface="Arial"/>
-              </a:rPr>
-              <a:t>17</a:t>
-            </a:r>
-          </a:p>
-        </p:txBody>
-      </p:sp>
-      <p:sp>
-        <p:nvSpPr>
-          <p:cNvPr id="33" name="Rectangle 32"/>
-          <p:cNvSpPr/>
-          <p:nvPr/>
-        </p:nvSpPr>
-        <p:spPr>
-          <a:xfrm>
-            <a:off x="1405929" y="2588353"/>
-            <a:ext cx="98546" cy="886367"/>
-          </a:xfrm>
-          <a:prstGeom prst="rect">
-            <a:avLst/>
-          </a:prstGeom>
-          <a:solidFill>
-            <a:srgbClr val="C53E1F"/>
-          </a:solidFill>
-          <a:ln w="2540">
-            <a:solidFill>
-              <a:srgbClr val="FFFFFF"/>
-            </a:solidFill>
-          </a:ln>
-          <a:effectLst/>
-        </p:spPr>
-        <p:style>
-          <a:lnRef idx="1">
-            <a:schemeClr val="accent1"/>
-          </a:lnRef>
-          <a:fillRef idx="3">
-            <a:schemeClr val="accent1"/>
-          </a:fillRef>
-          <a:effectRef idx="2">
-            <a:schemeClr val="accent1"/>
-          </a:effectRef>
-          <a:fontRef idx="minor">
-            <a:schemeClr val="lt1"/>
-          </a:fontRef>
-        </p:style>
-        <p:txBody>
-          <a:bodyPr rtlCol="0" anchor="ctr"/>
-          <a:lstStyle/>
-          <a:p>
-            <a:pPr algn="ctr"/>
-          </a:p>
-        </p:txBody>
-      </p:sp>
-      <p:sp>
-        <p:nvSpPr>
-          <p:cNvPr id="34" name="TextBox 33"/>
-          <p:cNvSpPr txBox="1"/>
-          <p:nvPr/>
-        </p:nvSpPr>
-        <p:spPr>
-          <a:xfrm>
-            <a:off x="1345474" y="3493008"/>
-            <a:ext cx="219456" cy="109728"/>
-          </a:xfrm>
-          <a:prstGeom prst="rect">
-            <a:avLst/>
-          </a:prstGeom>
-          <a:noFill/>
-          <a:effectLst/>
-        </p:spPr>
-        <p:txBody>
-          <a:bodyPr wrap="square" lIns="0" rIns="0" tIns="0" bIns="0" anchor="ctr">
-            <a:spAutoFit/>
-          </a:bodyPr>
-          <a:lstStyle/>
-          <a:p>
-            <a:pPr algn="ctr"/>
-            <a:r>
-              <a:rPr sz="400" b="0" i="0">
-                <a:solidFill>
-                  <a:srgbClr val="C53E1F"/>
-                </a:solidFill>
-                <a:latin typeface="Arial"/>
-              </a:rPr>
-              <a:t>34</a:t>
-            </a:r>
-          </a:p>
-        </p:txBody>
-      </p:sp>
-      <p:sp>
-        <p:nvSpPr>
-          <p:cNvPr id="35" name="Rectangle 34"/>
-          <p:cNvSpPr/>
-          <p:nvPr/>
-        </p:nvSpPr>
-        <p:spPr>
-          <a:xfrm>
-            <a:off x="1526107" y="2553215"/>
-            <a:ext cx="98546" cy="921505"/>
-          </a:xfrm>
-          <a:prstGeom prst="rect">
-            <a:avLst/>
-          </a:prstGeom>
-          <a:solidFill>
-            <a:srgbClr val="C53E1F"/>
-          </a:solidFill>
-          <a:ln w="2540">
-            <a:solidFill>
-              <a:srgbClr val="FFFFFF"/>
-            </a:solidFill>
-          </a:ln>
-          <a:effectLst/>
-        </p:spPr>
-        <p:style>
-          <a:lnRef idx="1">
-            <a:schemeClr val="accent1"/>
-          </a:lnRef>
-          <a:fillRef idx="3">
-            <a:schemeClr val="accent1"/>
-          </a:fillRef>
-          <a:effectRef idx="2">
-            <a:schemeClr val="accent1"/>
-          </a:effectRef>
-          <a:fontRef idx="minor">
-            <a:schemeClr val="lt1"/>
-          </a:fontRef>
-        </p:style>
-        <p:txBody>
-          <a:bodyPr rtlCol="0" anchor="ctr"/>
-          <a:lstStyle/>
-          <a:p>
-            <a:pPr algn="ctr"/>
-          </a:p>
-        </p:txBody>
-      </p:sp>
-      <p:sp>
-        <p:nvSpPr>
-          <p:cNvPr id="36" name="TextBox 35"/>
-          <p:cNvSpPr txBox="1"/>
-          <p:nvPr/>
-        </p:nvSpPr>
-        <p:spPr>
-          <a:xfrm>
-            <a:off x="1465652" y="3493008"/>
-            <a:ext cx="219456" cy="109728"/>
-          </a:xfrm>
-          <a:prstGeom prst="rect">
-            <a:avLst/>
-          </a:prstGeom>
-          <a:noFill/>
-          <a:effectLst/>
-        </p:spPr>
-        <p:txBody>
-          <a:bodyPr wrap="square" lIns="0" rIns="0" tIns="0" bIns="0" anchor="ctr">
-            <a:spAutoFit/>
-          </a:bodyPr>
-          <a:lstStyle/>
-          <a:p>
-            <a:pPr algn="ctr"/>
-            <a:r>
-              <a:rPr sz="400" b="0" i="0">
-                <a:solidFill>
-                  <a:srgbClr val="C53E1F"/>
-                </a:solidFill>
-                <a:latin typeface="Arial"/>
-              </a:rPr>
-              <a:t>22</a:t>
-            </a:r>
-          </a:p>
-        </p:txBody>
-      </p:sp>
-      <p:sp>
-        <p:nvSpPr>
-          <p:cNvPr id="37" name="Rectangle 36"/>
-          <p:cNvSpPr/>
-          <p:nvPr/>
-        </p:nvSpPr>
-        <p:spPr>
-          <a:xfrm>
-            <a:off x="1646285" y="2525542"/>
-            <a:ext cx="98546" cy="949178"/>
-          </a:xfrm>
-          <a:prstGeom prst="rect">
-            <a:avLst/>
-          </a:prstGeom>
-          <a:solidFill>
-            <a:srgbClr val="0A7D6E"/>
-          </a:solidFill>
-          <a:ln w="2540">
-            <a:solidFill>
-              <a:srgbClr val="FFFFFF"/>
-            </a:solidFill>
-          </a:ln>
-          <a:effectLst/>
-        </p:spPr>
-        <p:style>
-          <a:lnRef idx="1">
-            <a:schemeClr val="accent1"/>
-          </a:lnRef>
-          <a:fillRef idx="3">
-            <a:schemeClr val="accent1"/>
-          </a:fillRef>
-          <a:effectRef idx="2">
-            <a:schemeClr val="accent1"/>
-          </a:effectRef>
-          <a:fontRef idx="minor">
-            <a:schemeClr val="lt1"/>
-          </a:fontRef>
-        </p:style>
-        <p:txBody>
-          <a:bodyPr rtlCol="0" anchor="ctr"/>
-          <a:lstStyle/>
-          <a:p>
-            <a:pPr algn="ctr"/>
-          </a:p>
-        </p:txBody>
-      </p:sp>
-      <p:sp>
-        <p:nvSpPr>
-          <p:cNvPr id="38" name="Rectangle 37"/>
-          <p:cNvSpPr/>
-          <p:nvPr/>
-        </p:nvSpPr>
-        <p:spPr>
-          <a:xfrm>
-            <a:off x="1646285" y="2525542"/>
-            <a:ext cx="98546" cy="949178"/>
-          </a:xfrm>
-          <a:prstGeom prst="rect">
-            <a:avLst/>
-          </a:prstGeom>
-          <a:noFill/>
-          <a:ln w="16510">
-            <a:solidFill>
-              <a:srgbClr val="D4A300"/>
-            </a:solidFill>
-          </a:ln>
-          <a:effectLst/>
-        </p:spPr>
-        <p:style>
-          <a:lnRef idx="1">
-            <a:schemeClr val="accent1"/>
-          </a:lnRef>
-          <a:fillRef idx="3">
-            <a:schemeClr val="accent1"/>
-          </a:fillRef>
-          <a:effectRef idx="2">
-            <a:schemeClr val="accent1"/>
-          </a:effectRef>
-          <a:fontRef idx="minor">
-            <a:schemeClr val="lt1"/>
-          </a:fontRef>
-        </p:style>
-        <p:txBody>
-          <a:bodyPr rtlCol="0" anchor="ctr"/>
-          <a:lstStyle/>
-          <a:p>
-            <a:pPr algn="ctr"/>
-          </a:p>
-        </p:txBody>
-      </p:sp>
-      <p:sp>
-        <p:nvSpPr>
-          <p:cNvPr id="39" name="TextBox 38"/>
-          <p:cNvSpPr txBox="1"/>
-          <p:nvPr/>
-        </p:nvSpPr>
-        <p:spPr>
-          <a:xfrm>
-            <a:off x="1622406" y="2379238"/>
-            <a:ext cx="146304" cy="128016"/>
-          </a:xfrm>
-          <a:prstGeom prst="rect">
-            <a:avLst/>
-          </a:prstGeom>
-          <a:noFill/>
-          <a:effectLst/>
-        </p:spPr>
-        <p:txBody>
-          <a:bodyPr wrap="square" lIns="0" rIns="0" tIns="0" bIns="0" anchor="ctr">
-            <a:spAutoFit/>
-          </a:bodyPr>
-          <a:lstStyle/>
-          <a:p>
-            <a:pPr algn="ctr"/>
-            <a:r>
-              <a:rPr sz="1000" b="1" i="0">
-                <a:solidFill>
-                  <a:srgbClr val="D4A300"/>
-                </a:solidFill>
-                <a:latin typeface="Arial"/>
-              </a:rPr>
-              <a:t>✗</a:t>
-            </a:r>
-          </a:p>
-        </p:txBody>
-      </p:sp>
-      <p:sp>
-        <p:nvSpPr>
-          <p:cNvPr id="40" name="TextBox 39"/>
-          <p:cNvSpPr txBox="1"/>
-          <p:nvPr/>
-        </p:nvSpPr>
-        <p:spPr>
-          <a:xfrm>
-            <a:off x="1585830" y="3493008"/>
-            <a:ext cx="219456" cy="109728"/>
-          </a:xfrm>
-          <a:prstGeom prst="rect">
-            <a:avLst/>
-          </a:prstGeom>
-          <a:noFill/>
-          <a:effectLst/>
-        </p:spPr>
-        <p:txBody>
-          <a:bodyPr wrap="square" lIns="0" rIns="0" tIns="0" bIns="0" anchor="ctr">
-            <a:spAutoFit/>
-          </a:bodyPr>
-          <a:lstStyle/>
-          <a:p>
-            <a:pPr algn="ctr"/>
-            <a:r>
-              <a:rPr sz="400" b="0" i="0">
-                <a:solidFill>
-                  <a:srgbClr val="0A7D6E"/>
-                </a:solidFill>
-                <a:latin typeface="Arial"/>
-              </a:rPr>
-              <a:t>23</a:t>
-            </a:r>
-          </a:p>
-        </p:txBody>
-      </p:sp>
-      <p:sp>
-        <p:nvSpPr>
-          <p:cNvPr id="41" name="Rectangle 40"/>
-          <p:cNvSpPr/>
-          <p:nvPr/>
-        </p:nvSpPr>
-        <p:spPr>
-          <a:xfrm>
-            <a:off x="1766464" y="2475021"/>
-            <a:ext cx="98546" cy="999699"/>
-          </a:xfrm>
-          <a:prstGeom prst="rect">
-            <a:avLst/>
-          </a:prstGeom>
-          <a:solidFill>
-            <a:srgbClr val="C53E1F"/>
-          </a:solidFill>
-          <a:ln w="2540">
-            <a:solidFill>
-              <a:srgbClr val="FFFFFF"/>
-            </a:solidFill>
-          </a:ln>
-          <a:effectLst/>
-        </p:spPr>
-        <p:style>
-          <a:lnRef idx="1">
-            <a:schemeClr val="accent1"/>
-          </a:lnRef>
-          <a:fillRef idx="3">
-            <a:schemeClr val="accent1"/>
-          </a:fillRef>
-          <a:effectRef idx="2">
-            <a:schemeClr val="accent1"/>
-          </a:effectRef>
-          <a:fontRef idx="minor">
-            <a:schemeClr val="lt1"/>
-          </a:fontRef>
-        </p:style>
-        <p:txBody>
-          <a:bodyPr rtlCol="0" anchor="ctr"/>
-          <a:lstStyle/>
-          <a:p>
-            <a:pPr algn="ctr"/>
-          </a:p>
-        </p:txBody>
-      </p:sp>
-      <p:sp>
-        <p:nvSpPr>
-          <p:cNvPr id="42" name="TextBox 41"/>
-          <p:cNvSpPr txBox="1"/>
-          <p:nvPr/>
-        </p:nvSpPr>
-        <p:spPr>
-          <a:xfrm>
-            <a:off x="1706009" y="3493008"/>
-            <a:ext cx="219456" cy="109728"/>
-          </a:xfrm>
-          <a:prstGeom prst="rect">
-            <a:avLst/>
-          </a:prstGeom>
-          <a:noFill/>
-          <a:effectLst/>
-        </p:spPr>
-        <p:txBody>
-          <a:bodyPr wrap="square" lIns="0" rIns="0" tIns="0" bIns="0" anchor="ctr">
-            <a:spAutoFit/>
-          </a:bodyPr>
-          <a:lstStyle/>
-          <a:p>
-            <a:pPr algn="ctr"/>
-            <a:r>
-              <a:rPr sz="400" b="0" i="0">
-                <a:solidFill>
-                  <a:srgbClr val="C53E1F"/>
-                </a:solidFill>
-                <a:latin typeface="Arial"/>
-              </a:rPr>
-              <a:t>18</a:t>
-            </a:r>
-          </a:p>
-        </p:txBody>
-      </p:sp>
-      <p:sp>
-        <p:nvSpPr>
-          <p:cNvPr id="43" name="Rectangle 42"/>
-          <p:cNvSpPr/>
-          <p:nvPr/>
-        </p:nvSpPr>
-        <p:spPr>
-          <a:xfrm>
-            <a:off x="1886642" y="2417458"/>
-            <a:ext cx="98546" cy="1057262"/>
-          </a:xfrm>
-          <a:prstGeom prst="rect">
-            <a:avLst/>
-          </a:prstGeom>
-          <a:solidFill>
-            <a:srgbClr val="C53E1F"/>
-          </a:solidFill>
-          <a:ln w="2540">
-            <a:solidFill>
-              <a:srgbClr val="FFFFFF"/>
-            </a:solidFill>
-          </a:ln>
-          <a:effectLst/>
-        </p:spPr>
-        <p:style>
-          <a:lnRef idx="1">
-            <a:schemeClr val="accent1"/>
-          </a:lnRef>
-          <a:fillRef idx="3">
-            <a:schemeClr val="accent1"/>
-          </a:fillRef>
-          <a:effectRef idx="2">
-            <a:schemeClr val="accent1"/>
-          </a:effectRef>
-          <a:fontRef idx="minor">
-            <a:schemeClr val="lt1"/>
-          </a:fontRef>
-        </p:style>
-        <p:txBody>
-          <a:bodyPr rtlCol="0" anchor="ctr"/>
-          <a:lstStyle/>
-          <a:p>
-            <a:pPr algn="ctr"/>
-          </a:p>
-        </p:txBody>
-      </p:sp>
-      <p:sp>
-        <p:nvSpPr>
-          <p:cNvPr id="44" name="TextBox 43"/>
-          <p:cNvSpPr txBox="1"/>
-          <p:nvPr/>
-        </p:nvSpPr>
-        <p:spPr>
-          <a:xfrm>
-            <a:off x="1826187" y="3493008"/>
-            <a:ext cx="219456" cy="109728"/>
-          </a:xfrm>
-          <a:prstGeom prst="rect">
-            <a:avLst/>
-          </a:prstGeom>
-          <a:noFill/>
-          <a:effectLst/>
-        </p:spPr>
-        <p:txBody>
-          <a:bodyPr wrap="square" lIns="0" rIns="0" tIns="0" bIns="0" anchor="ctr">
-            <a:spAutoFit/>
-          </a:bodyPr>
-          <a:lstStyle/>
-          <a:p>
-            <a:pPr algn="ctr"/>
-            <a:r>
-              <a:rPr sz="400" b="0" i="0">
-                <a:solidFill>
-                  <a:srgbClr val="C53E1F"/>
-                </a:solidFill>
-                <a:latin typeface="Arial"/>
-              </a:rPr>
-              <a:t>13</a:t>
-            </a:r>
-          </a:p>
-        </p:txBody>
-      </p:sp>
-      <p:sp>
-        <p:nvSpPr>
-          <p:cNvPr id="45" name="Rectangle 44"/>
-          <p:cNvSpPr/>
-          <p:nvPr/>
-        </p:nvSpPr>
-        <p:spPr>
-          <a:xfrm>
-            <a:off x="2006820" y="2273589"/>
-            <a:ext cx="98546" cy="1201131"/>
-          </a:xfrm>
-          <a:prstGeom prst="rect">
-            <a:avLst/>
-          </a:prstGeom>
-          <a:solidFill>
-            <a:srgbClr val="0A7D6E"/>
-          </a:solidFill>
-          <a:ln w="2540">
-            <a:solidFill>
-              <a:srgbClr val="FFFFFF"/>
-            </a:solidFill>
-          </a:ln>
-          <a:effectLst/>
-        </p:spPr>
-        <p:style>
-          <a:lnRef idx="1">
-            <a:schemeClr val="accent1"/>
-          </a:lnRef>
-          <a:fillRef idx="3">
-            <a:schemeClr val="accent1"/>
-          </a:fillRef>
-          <a:effectRef idx="2">
-            <a:schemeClr val="accent1"/>
-          </a:effectRef>
-          <a:fontRef idx="minor">
-            <a:schemeClr val="lt1"/>
-          </a:fontRef>
-        </p:style>
-        <p:txBody>
-          <a:bodyPr rtlCol="0" anchor="ctr"/>
-          <a:lstStyle/>
-          <a:p>
-            <a:pPr algn="ctr"/>
-          </a:p>
-        </p:txBody>
-      </p:sp>
-      <p:sp>
-        <p:nvSpPr>
-          <p:cNvPr id="46" name="Rectangle 45"/>
-          <p:cNvSpPr/>
-          <p:nvPr/>
-        </p:nvSpPr>
-        <p:spPr>
-          <a:xfrm>
-            <a:off x="2006820" y="2273589"/>
-            <a:ext cx="98546" cy="1201131"/>
-          </a:xfrm>
-          <a:prstGeom prst="rect">
-            <a:avLst/>
-          </a:prstGeom>
-          <a:noFill/>
-          <a:ln w="16510">
-            <a:solidFill>
-              <a:srgbClr val="D4A300"/>
-            </a:solidFill>
-          </a:ln>
-          <a:effectLst/>
-        </p:spPr>
-        <p:style>
-          <a:lnRef idx="1">
-            <a:schemeClr val="accent1"/>
-          </a:lnRef>
-          <a:fillRef idx="3">
-            <a:schemeClr val="accent1"/>
-          </a:fillRef>
-          <a:effectRef idx="2">
-            <a:schemeClr val="accent1"/>
-          </a:effectRef>
-          <a:fontRef idx="minor">
-            <a:schemeClr val="lt1"/>
-          </a:fontRef>
-        </p:style>
-        <p:txBody>
-          <a:bodyPr rtlCol="0" anchor="ctr"/>
-          <a:lstStyle/>
-          <a:p>
-            <a:pPr algn="ctr"/>
-          </a:p>
-        </p:txBody>
-      </p:sp>
-      <p:sp>
-        <p:nvSpPr>
-          <p:cNvPr id="47" name="TextBox 46"/>
-          <p:cNvSpPr txBox="1"/>
-          <p:nvPr/>
-        </p:nvSpPr>
-        <p:spPr>
-          <a:xfrm>
-            <a:off x="1982941" y="2127285"/>
-            <a:ext cx="146304" cy="128016"/>
-          </a:xfrm>
-          <a:prstGeom prst="rect">
-            <a:avLst/>
-          </a:prstGeom>
-          <a:noFill/>
-          <a:effectLst/>
-        </p:spPr>
-        <p:txBody>
-          <a:bodyPr wrap="square" lIns="0" rIns="0" tIns="0" bIns="0" anchor="ctr">
-            <a:spAutoFit/>
-          </a:bodyPr>
-          <a:lstStyle/>
-          <a:p>
-            <a:pPr algn="ctr"/>
-            <a:r>
-              <a:rPr sz="1000" b="1" i="0">
-                <a:solidFill>
-                  <a:srgbClr val="D4A300"/>
-                </a:solidFill>
-                <a:latin typeface="Arial"/>
-              </a:rPr>
-              <a:t>✗</a:t>
-            </a:r>
-          </a:p>
-        </p:txBody>
-      </p:sp>
-      <p:sp>
-        <p:nvSpPr>
-          <p:cNvPr id="48" name="TextBox 47"/>
-          <p:cNvSpPr txBox="1"/>
-          <p:nvPr/>
-        </p:nvSpPr>
-        <p:spPr>
-          <a:xfrm>
-            <a:off x="1946365" y="3493008"/>
-            <a:ext cx="219456" cy="109728"/>
-          </a:xfrm>
-          <a:prstGeom prst="rect">
-            <a:avLst/>
-          </a:prstGeom>
-          <a:noFill/>
-          <a:effectLst/>
-        </p:spPr>
-        <p:txBody>
-          <a:bodyPr wrap="square" lIns="0" rIns="0" tIns="0" bIns="0" anchor="ctr">
-            <a:spAutoFit/>
-          </a:bodyPr>
-          <a:lstStyle/>
-          <a:p>
-            <a:pPr algn="ctr"/>
-            <a:r>
-              <a:rPr sz="400" b="0" i="0">
-                <a:solidFill>
-                  <a:srgbClr val="0A7D6E"/>
-                </a:solidFill>
-                <a:latin typeface="Arial"/>
-              </a:rPr>
-              <a:t>16</a:t>
-            </a:r>
-          </a:p>
-        </p:txBody>
-      </p:sp>
-      <p:sp>
-        <p:nvSpPr>
-          <p:cNvPr id="49" name="Rectangle 48"/>
-          <p:cNvSpPr/>
-          <p:nvPr/>
-        </p:nvSpPr>
-        <p:spPr>
-          <a:xfrm>
-            <a:off x="2126999" y="2272993"/>
-            <a:ext cx="98546" cy="1201727"/>
-          </a:xfrm>
-          <a:prstGeom prst="rect">
-            <a:avLst/>
-          </a:prstGeom>
-          <a:solidFill>
-            <a:srgbClr val="0A7D6E"/>
-          </a:solidFill>
-          <a:ln w="2540">
-            <a:solidFill>
-              <a:srgbClr val="FFFFFF"/>
-            </a:solidFill>
-          </a:ln>
-          <a:effectLst/>
-        </p:spPr>
-        <p:style>
-          <a:lnRef idx="1">
-            <a:schemeClr val="accent1"/>
-          </a:lnRef>
-          <a:fillRef idx="3">
-            <a:schemeClr val="accent1"/>
-          </a:fillRef>
-          <a:effectRef idx="2">
-            <a:schemeClr val="accent1"/>
-          </a:effectRef>
-          <a:fontRef idx="minor">
-            <a:schemeClr val="lt1"/>
-          </a:fontRef>
-        </p:style>
-        <p:txBody>
-          <a:bodyPr rtlCol="0" anchor="ctr"/>
-          <a:lstStyle/>
-          <a:p>
-            <a:pPr algn="ctr"/>
-          </a:p>
-        </p:txBody>
-      </p:sp>
-      <p:sp>
-        <p:nvSpPr>
-          <p:cNvPr id="50" name="Rectangle 49"/>
-          <p:cNvSpPr/>
-          <p:nvPr/>
-        </p:nvSpPr>
-        <p:spPr>
-          <a:xfrm>
-            <a:off x="2126999" y="2272993"/>
-            <a:ext cx="98546" cy="1201727"/>
-          </a:xfrm>
-          <a:prstGeom prst="rect">
-            <a:avLst/>
-          </a:prstGeom>
-          <a:noFill/>
-          <a:ln w="16510">
-            <a:solidFill>
-              <a:srgbClr val="D4A300"/>
-            </a:solidFill>
-          </a:ln>
-          <a:effectLst/>
-        </p:spPr>
-        <p:style>
-          <a:lnRef idx="1">
-            <a:schemeClr val="accent1"/>
-          </a:lnRef>
-          <a:fillRef idx="3">
-            <a:schemeClr val="accent1"/>
-          </a:fillRef>
-          <a:effectRef idx="2">
-            <a:schemeClr val="accent1"/>
-          </a:effectRef>
-          <a:fontRef idx="minor">
-            <a:schemeClr val="lt1"/>
-          </a:fontRef>
-        </p:style>
-        <p:txBody>
-          <a:bodyPr rtlCol="0" anchor="ctr"/>
-          <a:lstStyle/>
-          <a:p>
-            <a:pPr algn="ctr"/>
-          </a:p>
-        </p:txBody>
-      </p:sp>
-      <p:sp>
-        <p:nvSpPr>
-          <p:cNvPr id="51" name="TextBox 50"/>
-          <p:cNvSpPr txBox="1"/>
-          <p:nvPr/>
-        </p:nvSpPr>
-        <p:spPr>
-          <a:xfrm>
-            <a:off x="2103120" y="2126689"/>
-            <a:ext cx="146304" cy="128016"/>
-          </a:xfrm>
-          <a:prstGeom prst="rect">
-            <a:avLst/>
-          </a:prstGeom>
-          <a:noFill/>
-          <a:effectLst/>
-        </p:spPr>
-        <p:txBody>
-          <a:bodyPr wrap="square" lIns="0" rIns="0" tIns="0" bIns="0" anchor="ctr">
-            <a:spAutoFit/>
-          </a:bodyPr>
-          <a:lstStyle/>
-          <a:p>
-            <a:pPr algn="ctr"/>
-            <a:r>
-              <a:rPr sz="1000" b="1" i="0">
-                <a:solidFill>
-                  <a:srgbClr val="D4A300"/>
-                </a:solidFill>
-                <a:latin typeface="Arial"/>
-              </a:rPr>
-              <a:t>✗</a:t>
-            </a:r>
-          </a:p>
-        </p:txBody>
-      </p:sp>
-      <p:sp>
-        <p:nvSpPr>
-          <p:cNvPr id="52" name="TextBox 51"/>
-          <p:cNvSpPr txBox="1"/>
-          <p:nvPr/>
-        </p:nvSpPr>
-        <p:spPr>
-          <a:xfrm>
-            <a:off x="2066544" y="3493008"/>
-            <a:ext cx="219456" cy="109728"/>
-          </a:xfrm>
-          <a:prstGeom prst="rect">
-            <a:avLst/>
-          </a:prstGeom>
-          <a:noFill/>
-          <a:effectLst/>
-        </p:spPr>
-        <p:txBody>
-          <a:bodyPr wrap="square" lIns="0" rIns="0" tIns="0" bIns="0" anchor="ctr">
-            <a:spAutoFit/>
-          </a:bodyPr>
-          <a:lstStyle/>
-          <a:p>
-            <a:pPr algn="ctr"/>
-            <a:r>
-              <a:rPr sz="400" b="0" i="0">
-                <a:solidFill>
-                  <a:srgbClr val="0A7D6E"/>
-                </a:solidFill>
-                <a:latin typeface="Arial"/>
-              </a:rPr>
-              <a:t>8</a:t>
-            </a:r>
-          </a:p>
-        </p:txBody>
-      </p:sp>
-      <p:sp>
-        <p:nvSpPr>
-          <p:cNvPr id="53" name="Rectangle 52"/>
-          <p:cNvSpPr/>
-          <p:nvPr/>
-        </p:nvSpPr>
-        <p:spPr>
-          <a:xfrm>
-            <a:off x="2247177" y="2147043"/>
-            <a:ext cx="98546" cy="1327677"/>
-          </a:xfrm>
-          <a:prstGeom prst="rect">
-            <a:avLst/>
-          </a:prstGeom>
-          <a:solidFill>
-            <a:srgbClr val="0A7D6E"/>
-          </a:solidFill>
-          <a:ln w="2540">
-            <a:solidFill>
-              <a:srgbClr val="FFFFFF"/>
-            </a:solidFill>
-          </a:ln>
-          <a:effectLst/>
-        </p:spPr>
-        <p:style>
-          <a:lnRef idx="1">
-            <a:schemeClr val="accent1"/>
-          </a:lnRef>
-          <a:fillRef idx="3">
-            <a:schemeClr val="accent1"/>
-          </a:fillRef>
-          <a:effectRef idx="2">
-            <a:schemeClr val="accent1"/>
-          </a:effectRef>
-          <a:fontRef idx="minor">
-            <a:schemeClr val="lt1"/>
-          </a:fontRef>
-        </p:style>
-        <p:txBody>
-          <a:bodyPr rtlCol="0" anchor="ctr"/>
-          <a:lstStyle/>
-          <a:p>
-            <a:pPr algn="ctr"/>
-          </a:p>
-        </p:txBody>
-      </p:sp>
-      <p:sp>
-        <p:nvSpPr>
-          <p:cNvPr id="54" name="Rectangle 53"/>
-          <p:cNvSpPr/>
-          <p:nvPr/>
-        </p:nvSpPr>
-        <p:spPr>
-          <a:xfrm>
-            <a:off x="2247177" y="2147043"/>
-            <a:ext cx="98546" cy="1327677"/>
-          </a:xfrm>
-          <a:prstGeom prst="rect">
-            <a:avLst/>
-          </a:prstGeom>
-          <a:noFill/>
-          <a:ln w="16510">
-            <a:solidFill>
-              <a:srgbClr val="D4A300"/>
-            </a:solidFill>
-          </a:ln>
-          <a:effectLst/>
-        </p:spPr>
-        <p:style>
-          <a:lnRef idx="1">
-            <a:schemeClr val="accent1"/>
-          </a:lnRef>
-          <a:fillRef idx="3">
-            <a:schemeClr val="accent1"/>
-          </a:fillRef>
-          <a:effectRef idx="2">
-            <a:schemeClr val="accent1"/>
-          </a:effectRef>
-          <a:fontRef idx="minor">
-            <a:schemeClr val="lt1"/>
-          </a:fontRef>
-        </p:style>
-        <p:txBody>
-          <a:bodyPr rtlCol="0" anchor="ctr"/>
-          <a:lstStyle/>
-          <a:p>
-            <a:pPr algn="ctr"/>
-          </a:p>
-        </p:txBody>
-      </p:sp>
-      <p:sp>
-        <p:nvSpPr>
-          <p:cNvPr id="55" name="TextBox 54"/>
-          <p:cNvSpPr txBox="1"/>
-          <p:nvPr/>
-        </p:nvSpPr>
-        <p:spPr>
-          <a:xfrm>
-            <a:off x="2223298" y="2000739"/>
-            <a:ext cx="146304" cy="128016"/>
-          </a:xfrm>
-          <a:prstGeom prst="rect">
-            <a:avLst/>
-          </a:prstGeom>
-          <a:noFill/>
-          <a:effectLst/>
-        </p:spPr>
-        <p:txBody>
-          <a:bodyPr wrap="square" lIns="0" rIns="0" tIns="0" bIns="0" anchor="ctr">
-            <a:spAutoFit/>
-          </a:bodyPr>
-          <a:lstStyle/>
-          <a:p>
-            <a:pPr algn="ctr"/>
-            <a:r>
-              <a:rPr sz="1000" b="1" i="0">
-                <a:solidFill>
-                  <a:srgbClr val="D4A300"/>
-                </a:solidFill>
-                <a:latin typeface="Arial"/>
-              </a:rPr>
-              <a:t>✗</a:t>
-            </a:r>
-          </a:p>
-        </p:txBody>
-      </p:sp>
-      <p:sp>
-        <p:nvSpPr>
-          <p:cNvPr id="56" name="TextBox 55"/>
-          <p:cNvSpPr txBox="1"/>
-          <p:nvPr/>
-        </p:nvSpPr>
-        <p:spPr>
-          <a:xfrm>
-            <a:off x="2186722" y="3493008"/>
-            <a:ext cx="219456" cy="109728"/>
-          </a:xfrm>
-          <a:prstGeom prst="rect">
-            <a:avLst/>
-          </a:prstGeom>
-          <a:noFill/>
-          <a:effectLst/>
-        </p:spPr>
-        <p:txBody>
-          <a:bodyPr wrap="square" lIns="0" rIns="0" tIns="0" bIns="0" anchor="ctr">
-            <a:spAutoFit/>
-          </a:bodyPr>
-          <a:lstStyle/>
-          <a:p>
-            <a:pPr algn="ctr"/>
-            <a:r>
-              <a:rPr sz="400" b="0" i="0">
-                <a:solidFill>
-                  <a:srgbClr val="0A7D6E"/>
-                </a:solidFill>
-                <a:latin typeface="Arial"/>
-              </a:rPr>
-              <a:t>25</a:t>
-            </a:r>
-          </a:p>
-        </p:txBody>
-      </p:sp>
-      <p:sp>
-        <p:nvSpPr>
-          <p:cNvPr id="57" name="Rectangle 56"/>
-          <p:cNvSpPr/>
-          <p:nvPr/>
-        </p:nvSpPr>
-        <p:spPr>
-          <a:xfrm>
-            <a:off x="2367355" y="2077451"/>
-            <a:ext cx="98546" cy="1397269"/>
-          </a:xfrm>
-          <a:prstGeom prst="rect">
-            <a:avLst/>
-          </a:prstGeom>
-          <a:solidFill>
-            <a:srgbClr val="C53E1F"/>
-          </a:solidFill>
-          <a:ln w="2540">
-            <a:solidFill>
-              <a:srgbClr val="FFFFFF"/>
-            </a:solidFill>
-          </a:ln>
-          <a:effectLst/>
-        </p:spPr>
-        <p:style>
-          <a:lnRef idx="1">
-            <a:schemeClr val="accent1"/>
-          </a:lnRef>
-          <a:fillRef idx="3">
-            <a:schemeClr val="accent1"/>
-          </a:fillRef>
-          <a:effectRef idx="2">
-            <a:schemeClr val="accent1"/>
-          </a:effectRef>
-          <a:fontRef idx="minor">
-            <a:schemeClr val="lt1"/>
-          </a:fontRef>
-        </p:style>
-        <p:txBody>
-          <a:bodyPr rtlCol="0" anchor="ctr"/>
-          <a:lstStyle/>
-          <a:p>
-            <a:pPr algn="ctr"/>
-          </a:p>
-        </p:txBody>
-      </p:sp>
-      <p:sp>
-        <p:nvSpPr>
-          <p:cNvPr id="58" name="TextBox 57"/>
-          <p:cNvSpPr txBox="1"/>
-          <p:nvPr/>
-        </p:nvSpPr>
-        <p:spPr>
-          <a:xfrm>
-            <a:off x="2306900" y="3493008"/>
-            <a:ext cx="219456" cy="109728"/>
-          </a:xfrm>
-          <a:prstGeom prst="rect">
-            <a:avLst/>
-          </a:prstGeom>
-          <a:noFill/>
-          <a:effectLst/>
-        </p:spPr>
-        <p:txBody>
-          <a:bodyPr wrap="square" lIns="0" rIns="0" tIns="0" bIns="0" anchor="ctr">
-            <a:spAutoFit/>
-          </a:bodyPr>
-          <a:lstStyle/>
-          <a:p>
-            <a:pPr algn="ctr"/>
-            <a:r>
-              <a:rPr sz="400" b="0" i="0">
-                <a:solidFill>
-                  <a:srgbClr val="C53E1F"/>
-                </a:solidFill>
-                <a:latin typeface="Arial"/>
-              </a:rPr>
-              <a:t>32</a:t>
-            </a:r>
-          </a:p>
-        </p:txBody>
-      </p:sp>
-      <p:sp>
-        <p:nvSpPr>
-          <p:cNvPr id="59" name="Rectangle 58"/>
-          <p:cNvSpPr/>
-          <p:nvPr/>
-        </p:nvSpPr>
-        <p:spPr>
-          <a:xfrm>
-            <a:off x="2487533" y="1959619"/>
-            <a:ext cx="98546" cy="1515101"/>
-          </a:xfrm>
-          <a:prstGeom prst="rect">
-            <a:avLst/>
-          </a:prstGeom>
-          <a:solidFill>
-            <a:srgbClr val="C53E1F"/>
-          </a:solidFill>
-          <a:ln w="2540">
-            <a:solidFill>
-              <a:srgbClr val="FFFFFF"/>
-            </a:solidFill>
-          </a:ln>
-          <a:effectLst/>
-        </p:spPr>
-        <p:style>
-          <a:lnRef idx="1">
-            <a:schemeClr val="accent1"/>
-          </a:lnRef>
-          <a:fillRef idx="3">
-            <a:schemeClr val="accent1"/>
-          </a:fillRef>
-          <a:effectRef idx="2">
-            <a:schemeClr val="accent1"/>
-          </a:effectRef>
-          <a:fontRef idx="minor">
-            <a:schemeClr val="lt1"/>
-          </a:fontRef>
-        </p:style>
-        <p:txBody>
-          <a:bodyPr rtlCol="0" anchor="ctr"/>
-          <a:lstStyle/>
-          <a:p>
-            <a:pPr algn="ctr"/>
-          </a:p>
-        </p:txBody>
-      </p:sp>
-      <p:sp>
-        <p:nvSpPr>
-          <p:cNvPr id="60" name="Rectangle 59"/>
-          <p:cNvSpPr/>
-          <p:nvPr/>
-        </p:nvSpPr>
-        <p:spPr>
-          <a:xfrm>
-            <a:off x="2487533" y="1959619"/>
-            <a:ext cx="98546" cy="1515101"/>
-          </a:xfrm>
-          <a:prstGeom prst="rect">
-            <a:avLst/>
-          </a:prstGeom>
-          <a:noFill/>
-          <a:ln w="16510">
-            <a:solidFill>
-              <a:srgbClr val="D4A300"/>
-            </a:solidFill>
-          </a:ln>
-          <a:effectLst/>
-        </p:spPr>
-        <p:style>
-          <a:lnRef idx="1">
-            <a:schemeClr val="accent1"/>
-          </a:lnRef>
-          <a:fillRef idx="3">
-            <a:schemeClr val="accent1"/>
-          </a:fillRef>
-          <a:effectRef idx="2">
-            <a:schemeClr val="accent1"/>
-          </a:effectRef>
-          <a:fontRef idx="minor">
-            <a:schemeClr val="lt1"/>
-          </a:fontRef>
-        </p:style>
-        <p:txBody>
-          <a:bodyPr rtlCol="0" anchor="ctr"/>
-          <a:lstStyle/>
-          <a:p>
-            <a:pPr algn="ctr"/>
-          </a:p>
-        </p:txBody>
-      </p:sp>
-      <p:sp>
-        <p:nvSpPr>
-          <p:cNvPr id="61" name="TextBox 60"/>
-          <p:cNvSpPr txBox="1"/>
-          <p:nvPr/>
-        </p:nvSpPr>
-        <p:spPr>
-          <a:xfrm>
-            <a:off x="2463654" y="1813315"/>
-            <a:ext cx="146304" cy="128016"/>
-          </a:xfrm>
-          <a:prstGeom prst="rect">
-            <a:avLst/>
-          </a:prstGeom>
-          <a:noFill/>
-          <a:effectLst/>
-        </p:spPr>
-        <p:txBody>
-          <a:bodyPr wrap="square" lIns="0" rIns="0" tIns="0" bIns="0" anchor="ctr">
-            <a:spAutoFit/>
-          </a:bodyPr>
-          <a:lstStyle/>
-          <a:p>
-            <a:pPr algn="ctr"/>
-            <a:r>
-              <a:rPr sz="1000" b="1" i="0">
-                <a:solidFill>
-                  <a:srgbClr val="D4A300"/>
-                </a:solidFill>
-                <a:latin typeface="Arial"/>
-              </a:rPr>
-              <a:t>✗</a:t>
-            </a:r>
-          </a:p>
-        </p:txBody>
-      </p:sp>
-      <p:sp>
-        <p:nvSpPr>
-          <p:cNvPr id="62" name="TextBox 61"/>
-          <p:cNvSpPr txBox="1"/>
-          <p:nvPr/>
-        </p:nvSpPr>
-        <p:spPr>
-          <a:xfrm>
-            <a:off x="2427078" y="3493008"/>
-            <a:ext cx="219456" cy="109728"/>
-          </a:xfrm>
-          <a:prstGeom prst="rect">
-            <a:avLst/>
-          </a:prstGeom>
-          <a:noFill/>
-          <a:effectLst/>
-        </p:spPr>
-        <p:txBody>
-          <a:bodyPr wrap="square" lIns="0" rIns="0" tIns="0" bIns="0" anchor="ctr">
-            <a:spAutoFit/>
-          </a:bodyPr>
-          <a:lstStyle/>
-          <a:p>
-            <a:pPr algn="ctr"/>
-            <a:r>
-              <a:rPr sz="400" b="0" i="0">
-                <a:solidFill>
-                  <a:srgbClr val="C53E1F"/>
-                </a:solidFill>
-                <a:latin typeface="Arial"/>
-              </a:rPr>
-              <a:t>10</a:t>
-            </a:r>
-          </a:p>
-        </p:txBody>
-      </p:sp>
-      <p:sp>
-        <p:nvSpPr>
-          <p:cNvPr id="63" name="Rectangle 62"/>
-          <p:cNvSpPr/>
-          <p:nvPr/>
-        </p:nvSpPr>
-        <p:spPr>
-          <a:xfrm>
-            <a:off x="2607712" y="1942548"/>
-            <a:ext cx="98546" cy="1532172"/>
-          </a:xfrm>
-          <a:prstGeom prst="rect">
-            <a:avLst/>
-          </a:prstGeom>
-          <a:solidFill>
-            <a:srgbClr val="C53E1F"/>
-          </a:solidFill>
-          <a:ln w="2540">
-            <a:solidFill>
-              <a:srgbClr val="FFFFFF"/>
-            </a:solidFill>
-          </a:ln>
-          <a:effectLst/>
-        </p:spPr>
-        <p:style>
-          <a:lnRef idx="1">
-            <a:schemeClr val="accent1"/>
-          </a:lnRef>
-          <a:fillRef idx="3">
-            <a:schemeClr val="accent1"/>
-          </a:fillRef>
-          <a:effectRef idx="2">
-            <a:schemeClr val="accent1"/>
-          </a:effectRef>
-          <a:fontRef idx="minor">
-            <a:schemeClr val="lt1"/>
-          </a:fontRef>
-        </p:style>
-        <p:txBody>
-          <a:bodyPr rtlCol="0" anchor="ctr"/>
-          <a:lstStyle/>
-          <a:p>
-            <a:pPr algn="ctr"/>
-          </a:p>
-        </p:txBody>
-      </p:sp>
-      <p:sp>
-        <p:nvSpPr>
-          <p:cNvPr id="64" name="Rectangle 63"/>
-          <p:cNvSpPr/>
-          <p:nvPr/>
-        </p:nvSpPr>
-        <p:spPr>
-          <a:xfrm>
-            <a:off x="2607712" y="1942548"/>
-            <a:ext cx="98546" cy="1532172"/>
-          </a:xfrm>
-          <a:prstGeom prst="rect">
-            <a:avLst/>
-          </a:prstGeom>
-          <a:noFill/>
-          <a:ln w="16510">
-            <a:solidFill>
-              <a:srgbClr val="D4A300"/>
-            </a:solidFill>
-          </a:ln>
-          <a:effectLst/>
-        </p:spPr>
-        <p:style>
-          <a:lnRef idx="1">
-            <a:schemeClr val="accent1"/>
-          </a:lnRef>
-          <a:fillRef idx="3">
-            <a:schemeClr val="accent1"/>
-          </a:fillRef>
-          <a:effectRef idx="2">
-            <a:schemeClr val="accent1"/>
-          </a:effectRef>
-          <a:fontRef idx="minor">
-            <a:schemeClr val="lt1"/>
-          </a:fontRef>
-        </p:style>
-        <p:txBody>
-          <a:bodyPr rtlCol="0" anchor="ctr"/>
-          <a:lstStyle/>
-          <a:p>
-            <a:pPr algn="ctr"/>
-          </a:p>
-        </p:txBody>
-      </p:sp>
-      <p:sp>
-        <p:nvSpPr>
-          <p:cNvPr id="65" name="TextBox 64"/>
-          <p:cNvSpPr txBox="1"/>
-          <p:nvPr/>
-        </p:nvSpPr>
-        <p:spPr>
-          <a:xfrm>
-            <a:off x="2583833" y="1796244"/>
-            <a:ext cx="146304" cy="128016"/>
-          </a:xfrm>
-          <a:prstGeom prst="rect">
-            <a:avLst/>
-          </a:prstGeom>
-          <a:noFill/>
-          <a:effectLst/>
-        </p:spPr>
-        <p:txBody>
-          <a:bodyPr wrap="square" lIns="0" rIns="0" tIns="0" bIns="0" anchor="ctr">
-            <a:spAutoFit/>
-          </a:bodyPr>
-          <a:lstStyle/>
-          <a:p>
-            <a:pPr algn="ctr"/>
-            <a:r>
-              <a:rPr sz="1000" b="1" i="0">
-                <a:solidFill>
-                  <a:srgbClr val="D4A300"/>
-                </a:solidFill>
-                <a:latin typeface="Arial"/>
-              </a:rPr>
-              <a:t>✗</a:t>
-            </a:r>
-          </a:p>
-        </p:txBody>
-      </p:sp>
-      <p:sp>
-        <p:nvSpPr>
-          <p:cNvPr id="66" name="TextBox 65"/>
-          <p:cNvSpPr txBox="1"/>
-          <p:nvPr/>
-        </p:nvSpPr>
-        <p:spPr>
-          <a:xfrm>
-            <a:off x="2547257" y="3493008"/>
-            <a:ext cx="219456" cy="109728"/>
-          </a:xfrm>
-          <a:prstGeom prst="rect">
-            <a:avLst/>
-          </a:prstGeom>
-          <a:noFill/>
-          <a:effectLst/>
-        </p:spPr>
-        <p:txBody>
-          <a:bodyPr wrap="square" lIns="0" rIns="0" tIns="0" bIns="0" anchor="ctr">
-            <a:spAutoFit/>
-          </a:bodyPr>
-          <a:lstStyle/>
-          <a:p>
-            <a:pPr algn="ctr"/>
-            <a:r>
-              <a:rPr sz="400" b="0" i="0">
-                <a:solidFill>
-                  <a:srgbClr val="C53E1F"/>
-                </a:solidFill>
-                <a:latin typeface="Arial"/>
-              </a:rPr>
-              <a:t>1</a:t>
-            </a:r>
-          </a:p>
-        </p:txBody>
-      </p:sp>
-      <p:sp>
-        <p:nvSpPr>
-          <p:cNvPr id="67" name="Rectangle 66"/>
-          <p:cNvSpPr/>
-          <p:nvPr/>
-        </p:nvSpPr>
-        <p:spPr>
-          <a:xfrm>
-            <a:off x="2727890" y="1924828"/>
-            <a:ext cx="98546" cy="1549892"/>
-          </a:xfrm>
-          <a:prstGeom prst="rect">
-            <a:avLst/>
-          </a:prstGeom>
-          <a:solidFill>
-            <a:srgbClr val="C53E1F"/>
-          </a:solidFill>
-          <a:ln w="2540">
-            <a:solidFill>
-              <a:srgbClr val="FFFFFF"/>
-            </a:solidFill>
-          </a:ln>
-          <a:effectLst/>
-        </p:spPr>
-        <p:style>
-          <a:lnRef idx="1">
-            <a:schemeClr val="accent1"/>
-          </a:lnRef>
-          <a:fillRef idx="3">
-            <a:schemeClr val="accent1"/>
-          </a:fillRef>
-          <a:effectRef idx="2">
-            <a:schemeClr val="accent1"/>
-          </a:effectRef>
-          <a:fontRef idx="minor">
-            <a:schemeClr val="lt1"/>
-          </a:fontRef>
-        </p:style>
-        <p:txBody>
-          <a:bodyPr rtlCol="0" anchor="ctr"/>
-          <a:lstStyle/>
-          <a:p>
-            <a:pPr algn="ctr"/>
-          </a:p>
-        </p:txBody>
-      </p:sp>
-      <p:sp>
-        <p:nvSpPr>
-          <p:cNvPr id="68" name="Rectangle 67"/>
-          <p:cNvSpPr/>
-          <p:nvPr/>
-        </p:nvSpPr>
-        <p:spPr>
-          <a:xfrm>
-            <a:off x="2727890" y="1924828"/>
-            <a:ext cx="98546" cy="1549892"/>
-          </a:xfrm>
-          <a:prstGeom prst="rect">
-            <a:avLst/>
-          </a:prstGeom>
-          <a:noFill/>
-          <a:ln w="16510">
-            <a:solidFill>
-              <a:srgbClr val="D4A300"/>
-            </a:solidFill>
-          </a:ln>
-          <a:effectLst/>
-        </p:spPr>
-        <p:style>
-          <a:lnRef idx="1">
-            <a:schemeClr val="accent1"/>
-          </a:lnRef>
-          <a:fillRef idx="3">
-            <a:schemeClr val="accent1"/>
-          </a:fillRef>
-          <a:effectRef idx="2">
-            <a:schemeClr val="accent1"/>
-          </a:effectRef>
-          <a:fontRef idx="minor">
-            <a:schemeClr val="lt1"/>
-          </a:fontRef>
-        </p:style>
-        <p:txBody>
-          <a:bodyPr rtlCol="0" anchor="ctr"/>
-          <a:lstStyle/>
-          <a:p>
-            <a:pPr algn="ctr"/>
-          </a:p>
-        </p:txBody>
-      </p:sp>
-      <p:sp>
-        <p:nvSpPr>
-          <p:cNvPr id="69" name="TextBox 68"/>
-          <p:cNvSpPr txBox="1"/>
-          <p:nvPr/>
-        </p:nvSpPr>
-        <p:spPr>
-          <a:xfrm>
-            <a:off x="2704011" y="1778524"/>
-            <a:ext cx="146304" cy="128016"/>
-          </a:xfrm>
-          <a:prstGeom prst="rect">
-            <a:avLst/>
-          </a:prstGeom>
-          <a:noFill/>
-          <a:effectLst/>
-        </p:spPr>
-        <p:txBody>
-          <a:bodyPr wrap="square" lIns="0" rIns="0" tIns="0" bIns="0" anchor="ctr">
-            <a:spAutoFit/>
-          </a:bodyPr>
-          <a:lstStyle/>
-          <a:p>
-            <a:pPr algn="ctr"/>
-            <a:r>
-              <a:rPr sz="1000" b="1" i="0">
-                <a:solidFill>
-                  <a:srgbClr val="D4A300"/>
-                </a:solidFill>
-                <a:latin typeface="Arial"/>
-              </a:rPr>
-              <a:t>✗</a:t>
-            </a:r>
-          </a:p>
-        </p:txBody>
-      </p:sp>
-      <p:sp>
-        <p:nvSpPr>
-          <p:cNvPr id="70" name="TextBox 69"/>
-          <p:cNvSpPr txBox="1"/>
-          <p:nvPr/>
-        </p:nvSpPr>
-        <p:spPr>
-          <a:xfrm>
-            <a:off x="2667435" y="3493008"/>
-            <a:ext cx="219456" cy="109728"/>
-          </a:xfrm>
-          <a:prstGeom prst="rect">
-            <a:avLst/>
-          </a:prstGeom>
-          <a:noFill/>
-          <a:effectLst/>
-        </p:spPr>
-        <p:txBody>
-          <a:bodyPr wrap="square" lIns="0" rIns="0" tIns="0" bIns="0" anchor="ctr">
-            <a:spAutoFit/>
-          </a:bodyPr>
-          <a:lstStyle/>
-          <a:p>
-            <a:pPr algn="ctr"/>
-            <a:r>
-              <a:rPr sz="400" b="0" i="0">
-                <a:solidFill>
-                  <a:srgbClr val="C53E1F"/>
-                </a:solidFill>
-                <a:latin typeface="Arial"/>
-              </a:rPr>
-              <a:t>12</a:t>
-            </a:r>
-          </a:p>
-        </p:txBody>
-      </p:sp>
-      <p:sp>
-        <p:nvSpPr>
-          <p:cNvPr id="71" name="Rectangle 70"/>
-          <p:cNvSpPr/>
-          <p:nvPr/>
-        </p:nvSpPr>
-        <p:spPr>
-          <a:xfrm>
-            <a:off x="2848068" y="1904546"/>
-            <a:ext cx="98546" cy="1570174"/>
-          </a:xfrm>
-          <a:prstGeom prst="rect">
-            <a:avLst/>
-          </a:prstGeom>
-          <a:solidFill>
-            <a:srgbClr val="0A7D6E"/>
-          </a:solidFill>
-          <a:ln w="2540">
-            <a:solidFill>
-              <a:srgbClr val="FFFFFF"/>
-            </a:solidFill>
-          </a:ln>
-          <a:effectLst/>
-        </p:spPr>
-        <p:style>
-          <a:lnRef idx="1">
-            <a:schemeClr val="accent1"/>
-          </a:lnRef>
-          <a:fillRef idx="3">
-            <a:schemeClr val="accent1"/>
-          </a:fillRef>
-          <a:effectRef idx="2">
-            <a:schemeClr val="accent1"/>
-          </a:effectRef>
-          <a:fontRef idx="minor">
-            <a:schemeClr val="lt1"/>
-          </a:fontRef>
-        </p:style>
-        <p:txBody>
-          <a:bodyPr rtlCol="0" anchor="ctr"/>
-          <a:lstStyle/>
-          <a:p>
-            <a:pPr algn="ctr"/>
-          </a:p>
-        </p:txBody>
-      </p:sp>
-      <p:sp>
-        <p:nvSpPr>
-          <p:cNvPr id="72" name="TextBox 71"/>
-          <p:cNvSpPr txBox="1"/>
-          <p:nvPr/>
-        </p:nvSpPr>
-        <p:spPr>
-          <a:xfrm>
-            <a:off x="2787613" y="3493008"/>
-            <a:ext cx="219456" cy="109728"/>
-          </a:xfrm>
-          <a:prstGeom prst="rect">
-            <a:avLst/>
-          </a:prstGeom>
-          <a:noFill/>
-          <a:effectLst/>
-        </p:spPr>
-        <p:txBody>
-          <a:bodyPr wrap="square" lIns="0" rIns="0" tIns="0" bIns="0" anchor="ctr">
-            <a:spAutoFit/>
-          </a:bodyPr>
-          <a:lstStyle/>
-          <a:p>
-            <a:pPr algn="ctr"/>
-            <a:r>
-              <a:rPr sz="400" b="0" i="0">
-                <a:solidFill>
-                  <a:srgbClr val="0A7D6E"/>
-                </a:solidFill>
-                <a:latin typeface="Arial"/>
-              </a:rPr>
-              <a:t>28</a:t>
-            </a:r>
-          </a:p>
-        </p:txBody>
-      </p:sp>
-      <p:sp>
-        <p:nvSpPr>
-          <p:cNvPr id="73" name="Rectangle 72"/>
-          <p:cNvSpPr/>
-          <p:nvPr/>
-        </p:nvSpPr>
-        <p:spPr>
-          <a:xfrm>
-            <a:off x="2968247" y="1870041"/>
-            <a:ext cx="98546" cy="1604679"/>
-          </a:xfrm>
-          <a:prstGeom prst="rect">
-            <a:avLst/>
-          </a:prstGeom>
-          <a:solidFill>
-            <a:srgbClr val="C53E1F"/>
-          </a:solidFill>
-          <a:ln w="2540">
-            <a:solidFill>
-              <a:srgbClr val="FFFFFF"/>
-            </a:solidFill>
-          </a:ln>
-          <a:effectLst/>
-        </p:spPr>
-        <p:style>
-          <a:lnRef idx="1">
-            <a:schemeClr val="accent1"/>
-          </a:lnRef>
-          <a:fillRef idx="3">
-            <a:schemeClr val="accent1"/>
-          </a:fillRef>
-          <a:effectRef idx="2">
-            <a:schemeClr val="accent1"/>
-          </a:effectRef>
-          <a:fontRef idx="minor">
-            <a:schemeClr val="lt1"/>
-          </a:fontRef>
-        </p:style>
-        <p:txBody>
-          <a:bodyPr rtlCol="0" anchor="ctr"/>
-          <a:lstStyle/>
-          <a:p>
-            <a:pPr algn="ctr"/>
-          </a:p>
-        </p:txBody>
-      </p:sp>
-      <p:sp>
-        <p:nvSpPr>
-          <p:cNvPr id="74" name="Rectangle 73"/>
-          <p:cNvSpPr/>
-          <p:nvPr/>
-        </p:nvSpPr>
-        <p:spPr>
-          <a:xfrm>
-            <a:off x="2968247" y="1870041"/>
-            <a:ext cx="98546" cy="1604679"/>
-          </a:xfrm>
-          <a:prstGeom prst="rect">
-            <a:avLst/>
-          </a:prstGeom>
-          <a:noFill/>
-          <a:ln w="16510">
-            <a:solidFill>
-              <a:srgbClr val="D4A300"/>
-            </a:solidFill>
-          </a:ln>
-          <a:effectLst/>
-        </p:spPr>
-        <p:style>
-          <a:lnRef idx="1">
-            <a:schemeClr val="accent1"/>
-          </a:lnRef>
-          <a:fillRef idx="3">
-            <a:schemeClr val="accent1"/>
-          </a:fillRef>
-          <a:effectRef idx="2">
-            <a:schemeClr val="accent1"/>
-          </a:effectRef>
-          <a:fontRef idx="minor">
-            <a:schemeClr val="lt1"/>
-          </a:fontRef>
-        </p:style>
-        <p:txBody>
-          <a:bodyPr rtlCol="0" anchor="ctr"/>
-          <a:lstStyle/>
-          <a:p>
-            <a:pPr algn="ctr"/>
-          </a:p>
-        </p:txBody>
-      </p:sp>
-      <p:sp>
-        <p:nvSpPr>
-          <p:cNvPr id="75" name="TextBox 74"/>
-          <p:cNvSpPr txBox="1"/>
-          <p:nvPr/>
-        </p:nvSpPr>
-        <p:spPr>
-          <a:xfrm>
-            <a:off x="2944368" y="1723737"/>
-            <a:ext cx="146304" cy="128016"/>
-          </a:xfrm>
-          <a:prstGeom prst="rect">
-            <a:avLst/>
-          </a:prstGeom>
-          <a:noFill/>
-          <a:effectLst/>
-        </p:spPr>
-        <p:txBody>
-          <a:bodyPr wrap="square" lIns="0" rIns="0" tIns="0" bIns="0" anchor="ctr">
-            <a:spAutoFit/>
-          </a:bodyPr>
-          <a:lstStyle/>
-          <a:p>
-            <a:pPr algn="ctr"/>
-            <a:r>
-              <a:rPr sz="1000" b="1" i="0">
-                <a:solidFill>
-                  <a:srgbClr val="D4A300"/>
-                </a:solidFill>
-                <a:latin typeface="Arial"/>
-              </a:rPr>
-              <a:t>✗</a:t>
-            </a:r>
-          </a:p>
-        </p:txBody>
-      </p:sp>
-      <p:sp>
-        <p:nvSpPr>
-          <p:cNvPr id="76" name="TextBox 75"/>
-          <p:cNvSpPr txBox="1"/>
-          <p:nvPr/>
-        </p:nvSpPr>
-        <p:spPr>
-          <a:xfrm>
-            <a:off x="2907792" y="3493008"/>
-            <a:ext cx="219456" cy="109728"/>
-          </a:xfrm>
-          <a:prstGeom prst="rect">
-            <a:avLst/>
-          </a:prstGeom>
-          <a:noFill/>
-          <a:effectLst/>
-        </p:spPr>
-        <p:txBody>
-          <a:bodyPr wrap="square" lIns="0" rIns="0" tIns="0" bIns="0" anchor="ctr">
-            <a:spAutoFit/>
-          </a:bodyPr>
-          <a:lstStyle/>
-          <a:p>
-            <a:pPr algn="ctr"/>
-            <a:r>
-              <a:rPr sz="400" b="0" i="0">
-                <a:solidFill>
-                  <a:srgbClr val="C53E1F"/>
-                </a:solidFill>
-                <a:latin typeface="Arial"/>
-              </a:rPr>
-              <a:t>33</a:t>
-            </a:r>
-          </a:p>
-        </p:txBody>
-      </p:sp>
-      <p:sp>
-        <p:nvSpPr>
-          <p:cNvPr id="77" name="Rectangle 76"/>
-          <p:cNvSpPr/>
-          <p:nvPr/>
-        </p:nvSpPr>
-        <p:spPr>
-          <a:xfrm>
-            <a:off x="3088425" y="1849532"/>
-            <a:ext cx="98546" cy="1625188"/>
-          </a:xfrm>
-          <a:prstGeom prst="rect">
-            <a:avLst/>
-          </a:prstGeom>
-          <a:solidFill>
-            <a:srgbClr val="C53E1F"/>
-          </a:solidFill>
-          <a:ln w="2540">
-            <a:solidFill>
-              <a:srgbClr val="FFFFFF"/>
-            </a:solidFill>
-          </a:ln>
-          <a:effectLst/>
-        </p:spPr>
-        <p:style>
-          <a:lnRef idx="1">
-            <a:schemeClr val="accent1"/>
-          </a:lnRef>
-          <a:fillRef idx="3">
-            <a:schemeClr val="accent1"/>
-          </a:fillRef>
-          <a:effectRef idx="2">
-            <a:schemeClr val="accent1"/>
-          </a:effectRef>
-          <a:fontRef idx="minor">
-            <a:schemeClr val="lt1"/>
-          </a:fontRef>
-        </p:style>
-        <p:txBody>
-          <a:bodyPr rtlCol="0" anchor="ctr"/>
-          <a:lstStyle/>
-          <a:p>
-            <a:pPr algn="ctr"/>
-          </a:p>
-        </p:txBody>
-      </p:sp>
-      <p:sp>
-        <p:nvSpPr>
-          <p:cNvPr id="78" name="Rectangle 77"/>
-          <p:cNvSpPr/>
-          <p:nvPr/>
-        </p:nvSpPr>
-        <p:spPr>
-          <a:xfrm>
-            <a:off x="3088425" y="1849532"/>
-            <a:ext cx="98546" cy="1625188"/>
-          </a:xfrm>
-          <a:prstGeom prst="rect">
-            <a:avLst/>
-          </a:prstGeom>
-          <a:noFill/>
-          <a:ln w="16510">
-            <a:solidFill>
-              <a:srgbClr val="D4A300"/>
-            </a:solidFill>
-          </a:ln>
-          <a:effectLst/>
-        </p:spPr>
-        <p:style>
-          <a:lnRef idx="1">
-            <a:schemeClr val="accent1"/>
-          </a:lnRef>
-          <a:fillRef idx="3">
-            <a:schemeClr val="accent1"/>
-          </a:fillRef>
-          <a:effectRef idx="2">
-            <a:schemeClr val="accent1"/>
-          </a:effectRef>
-          <a:fontRef idx="minor">
-            <a:schemeClr val="lt1"/>
-          </a:fontRef>
-        </p:style>
-        <p:txBody>
-          <a:bodyPr rtlCol="0" anchor="ctr"/>
-          <a:lstStyle/>
-          <a:p>
-            <a:pPr algn="ctr"/>
-          </a:p>
-        </p:txBody>
-      </p:sp>
-      <p:sp>
-        <p:nvSpPr>
-          <p:cNvPr id="79" name="TextBox 78"/>
-          <p:cNvSpPr txBox="1"/>
-          <p:nvPr/>
-        </p:nvSpPr>
-        <p:spPr>
-          <a:xfrm>
-            <a:off x="3064546" y="1703228"/>
-            <a:ext cx="146304" cy="128016"/>
-          </a:xfrm>
-          <a:prstGeom prst="rect">
-            <a:avLst/>
-          </a:prstGeom>
-          <a:noFill/>
-          <a:effectLst/>
-        </p:spPr>
-        <p:txBody>
-          <a:bodyPr wrap="square" lIns="0" rIns="0" tIns="0" bIns="0" anchor="ctr">
-            <a:spAutoFit/>
-          </a:bodyPr>
-          <a:lstStyle/>
-          <a:p>
-            <a:pPr algn="ctr"/>
-            <a:r>
-              <a:rPr sz="1000" b="1" i="0">
-                <a:solidFill>
-                  <a:srgbClr val="D4A300"/>
-                </a:solidFill>
-                <a:latin typeface="Arial"/>
-              </a:rPr>
-              <a:t>✗</a:t>
-            </a:r>
-          </a:p>
-        </p:txBody>
-      </p:sp>
-      <p:sp>
-        <p:nvSpPr>
-          <p:cNvPr id="80" name="TextBox 79"/>
-          <p:cNvSpPr txBox="1"/>
-          <p:nvPr/>
-        </p:nvSpPr>
-        <p:spPr>
-          <a:xfrm>
-            <a:off x="3027970" y="3493008"/>
-            <a:ext cx="219456" cy="109728"/>
-          </a:xfrm>
-          <a:prstGeom prst="rect">
-            <a:avLst/>
-          </a:prstGeom>
-          <a:noFill/>
-          <a:effectLst/>
-        </p:spPr>
-        <p:txBody>
-          <a:bodyPr wrap="square" lIns="0" rIns="0" tIns="0" bIns="0" anchor="ctr">
-            <a:spAutoFit/>
-          </a:bodyPr>
-          <a:lstStyle/>
-          <a:p>
-            <a:pPr algn="ctr"/>
-            <a:r>
-              <a:rPr sz="400" b="0" i="0">
-                <a:solidFill>
-                  <a:srgbClr val="C53E1F"/>
-                </a:solidFill>
-                <a:latin typeface="Arial"/>
-              </a:rPr>
-              <a:t>5</a:t>
-            </a:r>
-          </a:p>
-        </p:txBody>
-      </p:sp>
-      <p:sp>
-        <p:nvSpPr>
-          <p:cNvPr id="81" name="Rectangle 80"/>
-          <p:cNvSpPr/>
-          <p:nvPr/>
-        </p:nvSpPr>
-        <p:spPr>
-          <a:xfrm>
-            <a:off x="3208603" y="1848709"/>
-            <a:ext cx="98546" cy="1626011"/>
-          </a:xfrm>
-          <a:prstGeom prst="rect">
-            <a:avLst/>
-          </a:prstGeom>
-          <a:solidFill>
-            <a:srgbClr val="0A7D6E"/>
-          </a:solidFill>
-          <a:ln w="2540">
-            <a:solidFill>
-              <a:srgbClr val="FFFFFF"/>
-            </a:solidFill>
-          </a:ln>
-          <a:effectLst/>
-        </p:spPr>
-        <p:style>
-          <a:lnRef idx="1">
-            <a:schemeClr val="accent1"/>
-          </a:lnRef>
-          <a:fillRef idx="3">
-            <a:schemeClr val="accent1"/>
-          </a:fillRef>
-          <a:effectRef idx="2">
-            <a:schemeClr val="accent1"/>
-          </a:effectRef>
-          <a:fontRef idx="minor">
-            <a:schemeClr val="lt1"/>
-          </a:fontRef>
-        </p:style>
-        <p:txBody>
-          <a:bodyPr rtlCol="0" anchor="ctr"/>
-          <a:lstStyle/>
-          <a:p>
-            <a:pPr algn="ctr"/>
-          </a:p>
-        </p:txBody>
-      </p:sp>
-      <p:sp>
-        <p:nvSpPr>
-          <p:cNvPr id="82" name="TextBox 81"/>
-          <p:cNvSpPr txBox="1"/>
-          <p:nvPr/>
-        </p:nvSpPr>
-        <p:spPr>
-          <a:xfrm>
-            <a:off x="3148148" y="3493008"/>
-            <a:ext cx="219456" cy="109728"/>
-          </a:xfrm>
-          <a:prstGeom prst="rect">
-            <a:avLst/>
-          </a:prstGeom>
-          <a:noFill/>
-          <a:effectLst/>
-        </p:spPr>
-        <p:txBody>
-          <a:bodyPr wrap="square" lIns="0" rIns="0" tIns="0" bIns="0" anchor="ctr">
-            <a:spAutoFit/>
-          </a:bodyPr>
-          <a:lstStyle/>
-          <a:p>
-            <a:pPr algn="ctr"/>
-            <a:r>
-              <a:rPr sz="400" b="0" i="0">
-                <a:solidFill>
-                  <a:srgbClr val="0A7D6E"/>
-                </a:solidFill>
-                <a:latin typeface="Arial"/>
-              </a:rPr>
-              <a:t>30</a:t>
-            </a:r>
-          </a:p>
-        </p:txBody>
-      </p:sp>
-      <p:sp>
-        <p:nvSpPr>
-          <p:cNvPr id="83" name="Rectangle 82"/>
-          <p:cNvSpPr/>
-          <p:nvPr/>
-        </p:nvSpPr>
-        <p:spPr>
-          <a:xfrm>
-            <a:off x="3328781" y="1745079"/>
-            <a:ext cx="98546" cy="1729641"/>
-          </a:xfrm>
-          <a:prstGeom prst="rect">
-            <a:avLst/>
-          </a:prstGeom>
-          <a:solidFill>
-            <a:srgbClr val="C53E1F"/>
-          </a:solidFill>
-          <a:ln w="2540">
-            <a:solidFill>
-              <a:srgbClr val="FFFFFF"/>
-            </a:solidFill>
-          </a:ln>
-          <a:effectLst/>
-        </p:spPr>
-        <p:style>
-          <a:lnRef idx="1">
-            <a:schemeClr val="accent1"/>
-          </a:lnRef>
-          <a:fillRef idx="3">
-            <a:schemeClr val="accent1"/>
-          </a:fillRef>
-          <a:effectRef idx="2">
-            <a:schemeClr val="accent1"/>
-          </a:effectRef>
-          <a:fontRef idx="minor">
-            <a:schemeClr val="lt1"/>
-          </a:fontRef>
-        </p:style>
-        <p:txBody>
-          <a:bodyPr rtlCol="0" anchor="ctr"/>
-          <a:lstStyle/>
-          <a:p>
-            <a:pPr algn="ctr"/>
-          </a:p>
-        </p:txBody>
-      </p:sp>
-      <p:sp>
-        <p:nvSpPr>
-          <p:cNvPr id="84" name="Rectangle 83"/>
-          <p:cNvSpPr/>
-          <p:nvPr/>
-        </p:nvSpPr>
-        <p:spPr>
-          <a:xfrm>
-            <a:off x="3328781" y="1745079"/>
-            <a:ext cx="98546" cy="1729641"/>
-          </a:xfrm>
-          <a:prstGeom prst="rect">
-            <a:avLst/>
-          </a:prstGeom>
-          <a:noFill/>
-          <a:ln w="16510">
-            <a:solidFill>
-              <a:srgbClr val="D4A300"/>
-            </a:solidFill>
-          </a:ln>
-          <a:effectLst/>
-        </p:spPr>
-        <p:style>
-          <a:lnRef idx="1">
-            <a:schemeClr val="accent1"/>
-          </a:lnRef>
-          <a:fillRef idx="3">
-            <a:schemeClr val="accent1"/>
-          </a:fillRef>
-          <a:effectRef idx="2">
-            <a:schemeClr val="accent1"/>
-          </a:effectRef>
-          <a:fontRef idx="minor">
-            <a:schemeClr val="lt1"/>
-          </a:fontRef>
-        </p:style>
-        <p:txBody>
-          <a:bodyPr rtlCol="0" anchor="ctr"/>
-          <a:lstStyle/>
-          <a:p>
-            <a:pPr algn="ctr"/>
-          </a:p>
-        </p:txBody>
-      </p:sp>
-      <p:sp>
-        <p:nvSpPr>
-          <p:cNvPr id="85" name="TextBox 84"/>
-          <p:cNvSpPr txBox="1"/>
-          <p:nvPr/>
-        </p:nvSpPr>
-        <p:spPr>
-          <a:xfrm>
-            <a:off x="3304902" y="1598775"/>
-            <a:ext cx="146304" cy="128016"/>
-          </a:xfrm>
-          <a:prstGeom prst="rect">
-            <a:avLst/>
-          </a:prstGeom>
-          <a:noFill/>
-          <a:effectLst/>
-        </p:spPr>
-        <p:txBody>
-          <a:bodyPr wrap="square" lIns="0" rIns="0" tIns="0" bIns="0" anchor="ctr">
-            <a:spAutoFit/>
-          </a:bodyPr>
-          <a:lstStyle/>
-          <a:p>
-            <a:pPr algn="ctr"/>
-            <a:r>
-              <a:rPr sz="1000" b="1" i="0">
-                <a:solidFill>
-                  <a:srgbClr val="D4A300"/>
-                </a:solidFill>
-                <a:latin typeface="Arial"/>
-              </a:rPr>
-              <a:t>✗</a:t>
-            </a:r>
-          </a:p>
-        </p:txBody>
-      </p:sp>
-      <p:sp>
-        <p:nvSpPr>
-          <p:cNvPr id="86" name="TextBox 85"/>
-          <p:cNvSpPr txBox="1"/>
-          <p:nvPr/>
-        </p:nvSpPr>
-        <p:spPr>
-          <a:xfrm>
-            <a:off x="3268326" y="3493008"/>
-            <a:ext cx="219456" cy="109728"/>
-          </a:xfrm>
-          <a:prstGeom prst="rect">
-            <a:avLst/>
-          </a:prstGeom>
-          <a:noFill/>
-          <a:effectLst/>
-        </p:spPr>
-        <p:txBody>
-          <a:bodyPr wrap="square" lIns="0" rIns="0" tIns="0" bIns="0" anchor="ctr">
-            <a:spAutoFit/>
-          </a:bodyPr>
-          <a:lstStyle/>
-          <a:p>
-            <a:pPr algn="ctr"/>
-            <a:r>
-              <a:rPr sz="400" b="0" i="0">
-                <a:solidFill>
-                  <a:srgbClr val="C53E1F"/>
-                </a:solidFill>
-                <a:latin typeface="Arial"/>
-              </a:rPr>
-              <a:t>21</a:t>
-            </a:r>
-          </a:p>
-        </p:txBody>
-      </p:sp>
-      <p:sp>
-        <p:nvSpPr>
-          <p:cNvPr id="87" name="Rectangle 86"/>
-          <p:cNvSpPr/>
-          <p:nvPr/>
-        </p:nvSpPr>
-        <p:spPr>
-          <a:xfrm>
-            <a:off x="3448960" y="1740655"/>
-            <a:ext cx="98546" cy="1734065"/>
-          </a:xfrm>
-          <a:prstGeom prst="rect">
-            <a:avLst/>
-          </a:prstGeom>
-          <a:solidFill>
-            <a:srgbClr val="C53E1F"/>
-          </a:solidFill>
-          <a:ln w="2540">
-            <a:solidFill>
-              <a:srgbClr val="FFFFFF"/>
-            </a:solidFill>
-          </a:ln>
-          <a:effectLst/>
-        </p:spPr>
-        <p:style>
-          <a:lnRef idx="1">
-            <a:schemeClr val="accent1"/>
-          </a:lnRef>
-          <a:fillRef idx="3">
-            <a:schemeClr val="accent1"/>
-          </a:fillRef>
-          <a:effectRef idx="2">
-            <a:schemeClr val="accent1"/>
-          </a:effectRef>
-          <a:fontRef idx="minor">
-            <a:schemeClr val="lt1"/>
-          </a:fontRef>
-        </p:style>
-        <p:txBody>
-          <a:bodyPr rtlCol="0" anchor="ctr"/>
-          <a:lstStyle/>
-          <a:p>
-            <a:pPr algn="ctr"/>
-          </a:p>
-        </p:txBody>
-      </p:sp>
-      <p:sp>
-        <p:nvSpPr>
-          <p:cNvPr id="88" name="Rectangle 87"/>
-          <p:cNvSpPr/>
-          <p:nvPr/>
-        </p:nvSpPr>
-        <p:spPr>
-          <a:xfrm>
-            <a:off x="3448960" y="1740655"/>
-            <a:ext cx="98546" cy="1734065"/>
-          </a:xfrm>
-          <a:prstGeom prst="rect">
-            <a:avLst/>
-          </a:prstGeom>
-          <a:noFill/>
-          <a:ln w="16510">
-            <a:solidFill>
-              <a:srgbClr val="D4A300"/>
-            </a:solidFill>
-          </a:ln>
-          <a:effectLst/>
-        </p:spPr>
-        <p:style>
-          <a:lnRef idx="1">
-            <a:schemeClr val="accent1"/>
-          </a:lnRef>
-          <a:fillRef idx="3">
-            <a:schemeClr val="accent1"/>
-          </a:fillRef>
-          <a:effectRef idx="2">
-            <a:schemeClr val="accent1"/>
-          </a:effectRef>
-          <a:fontRef idx="minor">
-            <a:schemeClr val="lt1"/>
-          </a:fontRef>
-        </p:style>
-        <p:txBody>
-          <a:bodyPr rtlCol="0" anchor="ctr"/>
-          <a:lstStyle/>
-          <a:p>
-            <a:pPr algn="ctr"/>
-          </a:p>
-        </p:txBody>
-      </p:sp>
-      <p:sp>
-        <p:nvSpPr>
-          <p:cNvPr id="89" name="TextBox 88"/>
-          <p:cNvSpPr txBox="1"/>
-          <p:nvPr/>
-        </p:nvSpPr>
-        <p:spPr>
-          <a:xfrm>
-            <a:off x="3425081" y="1594351"/>
-            <a:ext cx="146304" cy="128016"/>
-          </a:xfrm>
-          <a:prstGeom prst="rect">
-            <a:avLst/>
-          </a:prstGeom>
-          <a:noFill/>
-          <a:effectLst/>
-        </p:spPr>
-        <p:txBody>
-          <a:bodyPr wrap="square" lIns="0" rIns="0" tIns="0" bIns="0" anchor="ctr">
-            <a:spAutoFit/>
-          </a:bodyPr>
-          <a:lstStyle/>
-          <a:p>
-            <a:pPr algn="ctr"/>
-            <a:r>
-              <a:rPr sz="1000" b="1" i="0">
-                <a:solidFill>
-                  <a:srgbClr val="D4A300"/>
-                </a:solidFill>
-                <a:latin typeface="Arial"/>
-              </a:rPr>
-              <a:t>✗</a:t>
-            </a:r>
-          </a:p>
-        </p:txBody>
-      </p:sp>
-      <p:sp>
-        <p:nvSpPr>
-          <p:cNvPr id="90" name="TextBox 89"/>
-          <p:cNvSpPr txBox="1"/>
-          <p:nvPr/>
-        </p:nvSpPr>
-        <p:spPr>
-          <a:xfrm>
-            <a:off x="3388505" y="3493008"/>
-            <a:ext cx="219456" cy="109728"/>
-          </a:xfrm>
-          <a:prstGeom prst="rect">
-            <a:avLst/>
-          </a:prstGeom>
-          <a:noFill/>
-          <a:effectLst/>
-        </p:spPr>
-        <p:txBody>
-          <a:bodyPr wrap="square" lIns="0" rIns="0" tIns="0" bIns="0" anchor="ctr">
-            <a:spAutoFit/>
-          </a:bodyPr>
-          <a:lstStyle/>
-          <a:p>
-            <a:pPr algn="ctr"/>
-            <a:r>
-              <a:rPr sz="400" b="0" i="0">
-                <a:solidFill>
-                  <a:srgbClr val="C53E1F"/>
-                </a:solidFill>
-                <a:latin typeface="Arial"/>
-              </a:rPr>
-              <a:t>7</a:t>
-            </a:r>
-          </a:p>
-        </p:txBody>
-      </p:sp>
-      <p:sp>
-        <p:nvSpPr>
-          <p:cNvPr id="91" name="Rectangle 90"/>
-          <p:cNvSpPr/>
-          <p:nvPr/>
-        </p:nvSpPr>
-        <p:spPr>
-          <a:xfrm>
-            <a:off x="3569138" y="1720764"/>
-            <a:ext cx="98546" cy="1753956"/>
-          </a:xfrm>
-          <a:prstGeom prst="rect">
-            <a:avLst/>
-          </a:prstGeom>
-          <a:solidFill>
-            <a:srgbClr val="0A7D6E"/>
-          </a:solidFill>
-          <a:ln w="2540">
-            <a:solidFill>
-              <a:srgbClr val="FFFFFF"/>
-            </a:solidFill>
-          </a:ln>
-          <a:effectLst/>
-        </p:spPr>
-        <p:style>
-          <a:lnRef idx="1">
-            <a:schemeClr val="accent1"/>
-          </a:lnRef>
-          <a:fillRef idx="3">
-            <a:schemeClr val="accent1"/>
-          </a:fillRef>
-          <a:effectRef idx="2">
-            <a:schemeClr val="accent1"/>
-          </a:effectRef>
-          <a:fontRef idx="minor">
-            <a:schemeClr val="lt1"/>
-          </a:fontRef>
-        </p:style>
-        <p:txBody>
-          <a:bodyPr rtlCol="0" anchor="ctr"/>
-          <a:lstStyle/>
-          <a:p>
-            <a:pPr algn="ctr"/>
-          </a:p>
-        </p:txBody>
-      </p:sp>
-      <p:sp>
-        <p:nvSpPr>
-          <p:cNvPr id="92" name="TextBox 91"/>
-          <p:cNvSpPr txBox="1"/>
-          <p:nvPr/>
-        </p:nvSpPr>
-        <p:spPr>
-          <a:xfrm>
-            <a:off x="3508683" y="3493008"/>
-            <a:ext cx="219456" cy="109728"/>
-          </a:xfrm>
-          <a:prstGeom prst="rect">
-            <a:avLst/>
-          </a:prstGeom>
-          <a:noFill/>
-          <a:effectLst/>
-        </p:spPr>
-        <p:txBody>
-          <a:bodyPr wrap="square" lIns="0" rIns="0" tIns="0" bIns="0" anchor="ctr">
-            <a:spAutoFit/>
-          </a:bodyPr>
-          <a:lstStyle/>
-          <a:p>
-            <a:pPr algn="ctr"/>
-            <a:r>
-              <a:rPr sz="400" b="0" i="0">
-                <a:solidFill>
-                  <a:srgbClr val="0A7D6E"/>
-                </a:solidFill>
-                <a:latin typeface="Arial"/>
-              </a:rPr>
-              <a:t>20</a:t>
-            </a:r>
-          </a:p>
-        </p:txBody>
-      </p:sp>
-      <p:sp>
-        <p:nvSpPr>
-          <p:cNvPr id="93" name="Rectangle 92"/>
-          <p:cNvSpPr/>
-          <p:nvPr/>
-        </p:nvSpPr>
-        <p:spPr>
-          <a:xfrm>
-            <a:off x="3689316" y="1702302"/>
-            <a:ext cx="98546" cy="1772418"/>
-          </a:xfrm>
-          <a:prstGeom prst="rect">
-            <a:avLst/>
-          </a:prstGeom>
-          <a:solidFill>
-            <a:srgbClr val="0A7D6E"/>
-          </a:solidFill>
-          <a:ln w="2540">
-            <a:solidFill>
-              <a:srgbClr val="FFFFFF"/>
-            </a:solidFill>
-          </a:ln>
-          <a:effectLst/>
-        </p:spPr>
-        <p:style>
-          <a:lnRef idx="1">
-            <a:schemeClr val="accent1"/>
-          </a:lnRef>
-          <a:fillRef idx="3">
-            <a:schemeClr val="accent1"/>
-          </a:fillRef>
-          <a:effectRef idx="2">
-            <a:schemeClr val="accent1"/>
-          </a:effectRef>
-          <a:fontRef idx="minor">
-            <a:schemeClr val="lt1"/>
-          </a:fontRef>
-        </p:style>
-        <p:txBody>
-          <a:bodyPr rtlCol="0" anchor="ctr"/>
-          <a:lstStyle/>
-          <a:p>
-            <a:pPr algn="ctr"/>
-          </a:p>
-        </p:txBody>
-      </p:sp>
-      <p:sp>
-        <p:nvSpPr>
-          <p:cNvPr id="94" name="TextBox 93"/>
-          <p:cNvSpPr txBox="1"/>
-          <p:nvPr/>
-        </p:nvSpPr>
-        <p:spPr>
-          <a:xfrm>
-            <a:off x="3628861" y="3493008"/>
-            <a:ext cx="219456" cy="109728"/>
-          </a:xfrm>
-          <a:prstGeom prst="rect">
-            <a:avLst/>
-          </a:prstGeom>
-          <a:noFill/>
-          <a:effectLst/>
-        </p:spPr>
-        <p:txBody>
-          <a:bodyPr wrap="square" lIns="0" rIns="0" tIns="0" bIns="0" anchor="ctr">
-            <a:spAutoFit/>
-          </a:bodyPr>
-          <a:lstStyle/>
-          <a:p>
-            <a:pPr algn="ctr"/>
-            <a:r>
-              <a:rPr sz="400" b="0" i="0">
-                <a:solidFill>
-                  <a:srgbClr val="0A7D6E"/>
-                </a:solidFill>
-                <a:latin typeface="Arial"/>
-              </a:rPr>
-              <a:t>4</a:t>
-            </a:r>
-          </a:p>
-        </p:txBody>
-      </p:sp>
-      <p:sp>
-        <p:nvSpPr>
-          <p:cNvPr id="95" name="Rectangle 94"/>
-          <p:cNvSpPr/>
-          <p:nvPr/>
-        </p:nvSpPr>
-        <p:spPr>
-          <a:xfrm>
-            <a:off x="3809495" y="1693599"/>
-            <a:ext cx="98546" cy="1781121"/>
-          </a:xfrm>
-          <a:prstGeom prst="rect">
-            <a:avLst/>
-          </a:prstGeom>
-          <a:solidFill>
-            <a:srgbClr val="0A7D6E"/>
-          </a:solidFill>
-          <a:ln w="2540">
-            <a:solidFill>
-              <a:srgbClr val="FFFFFF"/>
-            </a:solidFill>
-          </a:ln>
-          <a:effectLst/>
-        </p:spPr>
-        <p:style>
-          <a:lnRef idx="1">
-            <a:schemeClr val="accent1"/>
-          </a:lnRef>
-          <a:fillRef idx="3">
-            <a:schemeClr val="accent1"/>
-          </a:fillRef>
-          <a:effectRef idx="2">
-            <a:schemeClr val="accent1"/>
-          </a:effectRef>
-          <a:fontRef idx="minor">
-            <a:schemeClr val="lt1"/>
-          </a:fontRef>
-        </p:style>
-        <p:txBody>
-          <a:bodyPr rtlCol="0" anchor="ctr"/>
-          <a:lstStyle/>
-          <a:p>
-            <a:pPr algn="ctr"/>
-          </a:p>
-        </p:txBody>
-      </p:sp>
-      <p:sp>
-        <p:nvSpPr>
-          <p:cNvPr id="96" name="TextBox 95"/>
-          <p:cNvSpPr txBox="1"/>
-          <p:nvPr/>
-        </p:nvSpPr>
-        <p:spPr>
-          <a:xfrm>
-            <a:off x="3749040" y="3493008"/>
-            <a:ext cx="219456" cy="109728"/>
-          </a:xfrm>
-          <a:prstGeom prst="rect">
-            <a:avLst/>
-          </a:prstGeom>
-          <a:noFill/>
-          <a:effectLst/>
-        </p:spPr>
-        <p:txBody>
-          <a:bodyPr wrap="square" lIns="0" rIns="0" tIns="0" bIns="0" anchor="ctr">
-            <a:spAutoFit/>
-          </a:bodyPr>
-          <a:lstStyle/>
-          <a:p>
-            <a:pPr algn="ctr"/>
-            <a:r>
-              <a:rPr sz="400" b="0" i="0">
-                <a:solidFill>
-                  <a:srgbClr val="0A7D6E"/>
-                </a:solidFill>
-                <a:latin typeface="Arial"/>
-              </a:rPr>
-              <a:t>31</a:t>
-            </a:r>
-          </a:p>
-        </p:txBody>
-      </p:sp>
-      <p:sp>
-        <p:nvSpPr>
-          <p:cNvPr id="97" name="Rectangle 96"/>
-          <p:cNvSpPr/>
-          <p:nvPr/>
-        </p:nvSpPr>
-        <p:spPr>
-          <a:xfrm>
-            <a:off x="3929673" y="1637866"/>
-            <a:ext cx="98546" cy="1836854"/>
-          </a:xfrm>
-          <a:prstGeom prst="rect">
-            <a:avLst/>
-          </a:prstGeom>
-          <a:solidFill>
-            <a:srgbClr val="0A7D6E"/>
-          </a:solidFill>
-          <a:ln w="2540">
-            <a:solidFill>
-              <a:srgbClr val="FFFFFF"/>
-            </a:solidFill>
-          </a:ln>
-          <a:effectLst/>
-        </p:spPr>
-        <p:style>
-          <a:lnRef idx="1">
-            <a:schemeClr val="accent1"/>
-          </a:lnRef>
-          <a:fillRef idx="3">
-            <a:schemeClr val="accent1"/>
-          </a:fillRef>
-          <a:effectRef idx="2">
-            <a:schemeClr val="accent1"/>
-          </a:effectRef>
-          <a:fontRef idx="minor">
-            <a:schemeClr val="lt1"/>
-          </a:fontRef>
-        </p:style>
-        <p:txBody>
-          <a:bodyPr rtlCol="0" anchor="ctr"/>
-          <a:lstStyle/>
-          <a:p>
-            <a:pPr algn="ctr"/>
-          </a:p>
-        </p:txBody>
-      </p:sp>
-      <p:sp>
-        <p:nvSpPr>
-          <p:cNvPr id="98" name="TextBox 97"/>
-          <p:cNvSpPr txBox="1"/>
-          <p:nvPr/>
-        </p:nvSpPr>
-        <p:spPr>
-          <a:xfrm>
-            <a:off x="3869218" y="3493008"/>
-            <a:ext cx="219456" cy="109728"/>
-          </a:xfrm>
-          <a:prstGeom prst="rect">
-            <a:avLst/>
-          </a:prstGeom>
-          <a:noFill/>
-          <a:effectLst/>
-        </p:spPr>
-        <p:txBody>
-          <a:bodyPr wrap="square" lIns="0" rIns="0" tIns="0" bIns="0" anchor="ctr">
-            <a:spAutoFit/>
-          </a:bodyPr>
-          <a:lstStyle/>
-          <a:p>
-            <a:pPr algn="ctr"/>
-            <a:r>
-              <a:rPr sz="400" b="0" i="0">
-                <a:solidFill>
-                  <a:srgbClr val="0A7D6E"/>
-                </a:solidFill>
-                <a:latin typeface="Arial"/>
-              </a:rPr>
-              <a:t>6</a:t>
-            </a:r>
-          </a:p>
-        </p:txBody>
-      </p:sp>
-      <p:sp>
-        <p:nvSpPr>
-          <p:cNvPr id="99" name="Rectangle 98"/>
-          <p:cNvSpPr/>
-          <p:nvPr/>
-        </p:nvSpPr>
-        <p:spPr>
-          <a:xfrm>
-            <a:off x="4049851" y="1576072"/>
-            <a:ext cx="98546" cy="1898648"/>
-          </a:xfrm>
-          <a:prstGeom prst="rect">
-            <a:avLst/>
-          </a:prstGeom>
-          <a:solidFill>
-            <a:srgbClr val="C53E1F"/>
-          </a:solidFill>
-          <a:ln w="2540">
-            <a:solidFill>
-              <a:srgbClr val="FFFFFF"/>
-            </a:solidFill>
-          </a:ln>
-          <a:effectLst/>
-        </p:spPr>
-        <p:style>
-          <a:lnRef idx="1">
-            <a:schemeClr val="accent1"/>
-          </a:lnRef>
-          <a:fillRef idx="3">
-            <a:schemeClr val="accent1"/>
-          </a:fillRef>
-          <a:effectRef idx="2">
-            <a:schemeClr val="accent1"/>
-          </a:effectRef>
-          <a:fontRef idx="minor">
-            <a:schemeClr val="lt1"/>
-          </a:fontRef>
-        </p:style>
-        <p:txBody>
-          <a:bodyPr rtlCol="0" anchor="ctr"/>
-          <a:lstStyle/>
-          <a:p>
-            <a:pPr algn="ctr"/>
-          </a:p>
-        </p:txBody>
-      </p:sp>
-      <p:sp>
-        <p:nvSpPr>
-          <p:cNvPr id="100" name="Rectangle 99"/>
-          <p:cNvSpPr/>
-          <p:nvPr/>
-        </p:nvSpPr>
-        <p:spPr>
-          <a:xfrm>
-            <a:off x="4049851" y="1576072"/>
-            <a:ext cx="98546" cy="1898648"/>
-          </a:xfrm>
-          <a:prstGeom prst="rect">
-            <a:avLst/>
-          </a:prstGeom>
-          <a:noFill/>
-          <a:ln w="16510">
-            <a:solidFill>
-              <a:srgbClr val="D4A300"/>
-            </a:solidFill>
-          </a:ln>
-          <a:effectLst/>
-        </p:spPr>
-        <p:style>
-          <a:lnRef idx="1">
-            <a:schemeClr val="accent1"/>
-          </a:lnRef>
-          <a:fillRef idx="3">
-            <a:schemeClr val="accent1"/>
-          </a:fillRef>
-          <a:effectRef idx="2">
-            <a:schemeClr val="accent1"/>
-          </a:effectRef>
-          <a:fontRef idx="minor">
-            <a:schemeClr val="lt1"/>
-          </a:fontRef>
-        </p:style>
-        <p:txBody>
-          <a:bodyPr rtlCol="0" anchor="ctr"/>
-          <a:lstStyle/>
-          <a:p>
-            <a:pPr algn="ctr"/>
-          </a:p>
-        </p:txBody>
-      </p:sp>
-      <p:sp>
-        <p:nvSpPr>
-          <p:cNvPr id="101" name="TextBox 100"/>
-          <p:cNvSpPr txBox="1"/>
-          <p:nvPr/>
-        </p:nvSpPr>
-        <p:spPr>
-          <a:xfrm>
-            <a:off x="4025972" y="1429768"/>
-            <a:ext cx="146304" cy="128016"/>
-          </a:xfrm>
-          <a:prstGeom prst="rect">
-            <a:avLst/>
-          </a:prstGeom>
-          <a:noFill/>
-          <a:effectLst/>
-        </p:spPr>
-        <p:txBody>
-          <a:bodyPr wrap="square" lIns="0" rIns="0" tIns="0" bIns="0" anchor="ctr">
-            <a:spAutoFit/>
-          </a:bodyPr>
-          <a:lstStyle/>
-          <a:p>
-            <a:pPr algn="ctr"/>
-            <a:r>
-              <a:rPr sz="1000" b="1" i="0">
-                <a:solidFill>
-                  <a:srgbClr val="D4A300"/>
-                </a:solidFill>
-                <a:latin typeface="Arial"/>
-              </a:rPr>
-              <a:t>✗</a:t>
-            </a:r>
-          </a:p>
-        </p:txBody>
-      </p:sp>
-      <p:sp>
-        <p:nvSpPr>
-          <p:cNvPr id="102" name="TextBox 101"/>
-          <p:cNvSpPr txBox="1"/>
-          <p:nvPr/>
-        </p:nvSpPr>
-        <p:spPr>
-          <a:xfrm>
-            <a:off x="3989396" y="3493008"/>
-            <a:ext cx="219456" cy="109728"/>
-          </a:xfrm>
-          <a:prstGeom prst="rect">
-            <a:avLst/>
-          </a:prstGeom>
-          <a:noFill/>
-          <a:effectLst/>
-        </p:spPr>
-        <p:txBody>
-          <a:bodyPr wrap="square" lIns="0" rIns="0" tIns="0" bIns="0" anchor="ctr">
-            <a:spAutoFit/>
-          </a:bodyPr>
-          <a:lstStyle/>
-          <a:p>
-            <a:pPr algn="ctr"/>
-            <a:r>
-              <a:rPr sz="400" b="0" i="0">
-                <a:solidFill>
-                  <a:srgbClr val="C53E1F"/>
-                </a:solidFill>
-                <a:latin typeface="Arial"/>
-              </a:rPr>
-              <a:t>11</a:t>
-            </a:r>
-          </a:p>
-        </p:txBody>
-      </p:sp>
-      <p:sp>
-        <p:nvSpPr>
-          <p:cNvPr id="103" name="Rectangle 102"/>
-          <p:cNvSpPr/>
-          <p:nvPr/>
-        </p:nvSpPr>
-        <p:spPr>
-          <a:xfrm>
-            <a:off x="4170029" y="1573876"/>
-            <a:ext cx="98546" cy="1900844"/>
-          </a:xfrm>
-          <a:prstGeom prst="rect">
-            <a:avLst/>
-          </a:prstGeom>
-          <a:solidFill>
-            <a:srgbClr val="0A7D6E"/>
-          </a:solidFill>
-          <a:ln w="2540">
-            <a:solidFill>
-              <a:srgbClr val="FFFFFF"/>
-            </a:solidFill>
-          </a:ln>
-          <a:effectLst/>
-        </p:spPr>
-        <p:style>
-          <a:lnRef idx="1">
-            <a:schemeClr val="accent1"/>
-          </a:lnRef>
-          <a:fillRef idx="3">
-            <a:schemeClr val="accent1"/>
-          </a:fillRef>
-          <a:effectRef idx="2">
-            <a:schemeClr val="accent1"/>
-          </a:effectRef>
-          <a:fontRef idx="minor">
-            <a:schemeClr val="lt1"/>
-          </a:fontRef>
-        </p:style>
-        <p:txBody>
-          <a:bodyPr rtlCol="0" anchor="ctr"/>
-          <a:lstStyle/>
-          <a:p>
-            <a:pPr algn="ctr"/>
-          </a:p>
-        </p:txBody>
-      </p:sp>
-      <p:sp>
-        <p:nvSpPr>
-          <p:cNvPr id="104" name="TextBox 103"/>
-          <p:cNvSpPr txBox="1"/>
-          <p:nvPr/>
-        </p:nvSpPr>
-        <p:spPr>
-          <a:xfrm>
-            <a:off x="4109574" y="3493008"/>
-            <a:ext cx="219456" cy="109728"/>
-          </a:xfrm>
-          <a:prstGeom prst="rect">
-            <a:avLst/>
-          </a:prstGeom>
-          <a:noFill/>
-          <a:effectLst/>
-        </p:spPr>
-        <p:txBody>
-          <a:bodyPr wrap="square" lIns="0" rIns="0" tIns="0" bIns="0" anchor="ctr">
-            <a:spAutoFit/>
-          </a:bodyPr>
-          <a:lstStyle/>
-          <a:p>
-            <a:pPr algn="ctr"/>
-            <a:r>
-              <a:rPr sz="400" b="0" i="0">
-                <a:solidFill>
-                  <a:srgbClr val="0A7D6E"/>
-                </a:solidFill>
-                <a:latin typeface="Arial"/>
-              </a:rPr>
-              <a:t>14</a:t>
-            </a:r>
-          </a:p>
-        </p:txBody>
-      </p:sp>
-      <p:sp>
-        <p:nvSpPr>
-          <p:cNvPr id="105" name="Rectangle 104"/>
-          <p:cNvSpPr/>
-          <p:nvPr/>
-        </p:nvSpPr>
-        <p:spPr>
-          <a:xfrm>
-            <a:off x="4290208" y="1527756"/>
-            <a:ext cx="98546" cy="1946964"/>
-          </a:xfrm>
-          <a:prstGeom prst="rect">
-            <a:avLst/>
-          </a:prstGeom>
-          <a:solidFill>
-            <a:srgbClr val="0A7D6E"/>
-          </a:solidFill>
-          <a:ln w="2540">
-            <a:solidFill>
-              <a:srgbClr val="FFFFFF"/>
-            </a:solidFill>
-          </a:ln>
-          <a:effectLst/>
-        </p:spPr>
-        <p:style>
-          <a:lnRef idx="1">
-            <a:schemeClr val="accent1"/>
-          </a:lnRef>
-          <a:fillRef idx="3">
-            <a:schemeClr val="accent1"/>
-          </a:fillRef>
-          <a:effectRef idx="2">
-            <a:schemeClr val="accent1"/>
-          </a:effectRef>
-          <a:fontRef idx="minor">
-            <a:schemeClr val="lt1"/>
-          </a:fontRef>
-        </p:style>
-        <p:txBody>
-          <a:bodyPr rtlCol="0" anchor="ctr"/>
-          <a:lstStyle/>
-          <a:p>
-            <a:pPr algn="ctr"/>
-          </a:p>
-        </p:txBody>
-      </p:sp>
-      <p:sp>
-        <p:nvSpPr>
-          <p:cNvPr id="106" name="TextBox 105"/>
-          <p:cNvSpPr txBox="1"/>
-          <p:nvPr/>
-        </p:nvSpPr>
-        <p:spPr>
-          <a:xfrm>
-            <a:off x="4229753" y="3493008"/>
-            <a:ext cx="219456" cy="109728"/>
-          </a:xfrm>
-          <a:prstGeom prst="rect">
-            <a:avLst/>
-          </a:prstGeom>
-          <a:noFill/>
-          <a:effectLst/>
-        </p:spPr>
-        <p:txBody>
-          <a:bodyPr wrap="square" lIns="0" rIns="0" tIns="0" bIns="0" anchor="ctr">
-            <a:spAutoFit/>
-          </a:bodyPr>
-          <a:lstStyle/>
-          <a:p>
-            <a:pPr algn="ctr"/>
-            <a:r>
-              <a:rPr sz="400" b="0" i="0">
-                <a:solidFill>
-                  <a:srgbClr val="0A7D6E"/>
-                </a:solidFill>
-                <a:latin typeface="Arial"/>
-              </a:rPr>
-              <a:t>2</a:t>
-            </a:r>
-          </a:p>
-        </p:txBody>
-      </p:sp>
-      <p:sp>
-        <p:nvSpPr>
-          <p:cNvPr id="107" name="Rectangle 106"/>
-          <p:cNvSpPr/>
-          <p:nvPr/>
-        </p:nvSpPr>
-        <p:spPr>
-          <a:xfrm>
-            <a:off x="4410386" y="1442514"/>
-            <a:ext cx="98546" cy="2032206"/>
-          </a:xfrm>
-          <a:prstGeom prst="rect">
-            <a:avLst/>
-          </a:prstGeom>
-          <a:solidFill>
-            <a:srgbClr val="0A7D6E"/>
-          </a:solidFill>
-          <a:ln w="2540">
-            <a:solidFill>
-              <a:srgbClr val="FFFFFF"/>
-            </a:solidFill>
-          </a:ln>
-          <a:effectLst/>
-        </p:spPr>
-        <p:style>
-          <a:lnRef idx="1">
-            <a:schemeClr val="accent1"/>
-          </a:lnRef>
-          <a:fillRef idx="3">
-            <a:schemeClr val="accent1"/>
-          </a:fillRef>
-          <a:effectRef idx="2">
-            <a:schemeClr val="accent1"/>
-          </a:effectRef>
-          <a:fontRef idx="minor">
-            <a:schemeClr val="lt1"/>
-          </a:fontRef>
-        </p:style>
-        <p:txBody>
-          <a:bodyPr rtlCol="0" anchor="ctr"/>
-          <a:lstStyle/>
-          <a:p>
-            <a:pPr algn="ctr"/>
-          </a:p>
-        </p:txBody>
-      </p:sp>
-      <p:sp>
-        <p:nvSpPr>
-          <p:cNvPr id="108" name="TextBox 107"/>
-          <p:cNvSpPr txBox="1"/>
-          <p:nvPr/>
-        </p:nvSpPr>
-        <p:spPr>
-          <a:xfrm>
-            <a:off x="4349931" y="3493008"/>
-            <a:ext cx="219456" cy="109728"/>
-          </a:xfrm>
-          <a:prstGeom prst="rect">
-            <a:avLst/>
-          </a:prstGeom>
-          <a:noFill/>
-          <a:effectLst/>
-        </p:spPr>
-        <p:txBody>
-          <a:bodyPr wrap="square" lIns="0" rIns="0" tIns="0" bIns="0" anchor="ctr">
-            <a:spAutoFit/>
-          </a:bodyPr>
-          <a:lstStyle/>
-          <a:p>
-            <a:pPr algn="ctr"/>
-            <a:r>
-              <a:rPr sz="400" b="0" i="0">
-                <a:solidFill>
-                  <a:srgbClr val="0A7D6E"/>
-                </a:solidFill>
-                <a:latin typeface="Arial"/>
-              </a:rPr>
-              <a:t>27</a:t>
-            </a:r>
-          </a:p>
-        </p:txBody>
-      </p:sp>
-      <p:sp>
-        <p:nvSpPr>
-          <p:cNvPr id="109" name="Rectangle 108"/>
-          <p:cNvSpPr/>
-          <p:nvPr/>
-        </p:nvSpPr>
-        <p:spPr>
-          <a:xfrm>
-            <a:off x="4530564" y="1412949"/>
-            <a:ext cx="98546" cy="2061771"/>
-          </a:xfrm>
-          <a:prstGeom prst="rect">
-            <a:avLst/>
-          </a:prstGeom>
-          <a:solidFill>
-            <a:srgbClr val="0A7D6E"/>
-          </a:solidFill>
-          <a:ln w="2540">
-            <a:solidFill>
-              <a:srgbClr val="FFFFFF"/>
-            </a:solidFill>
-          </a:ln>
-          <a:effectLst/>
-        </p:spPr>
-        <p:style>
-          <a:lnRef idx="1">
-            <a:schemeClr val="accent1"/>
-          </a:lnRef>
-          <a:fillRef idx="3">
-            <a:schemeClr val="accent1"/>
-          </a:fillRef>
-          <a:effectRef idx="2">
-            <a:schemeClr val="accent1"/>
-          </a:effectRef>
-          <a:fontRef idx="minor">
-            <a:schemeClr val="lt1"/>
-          </a:fontRef>
-        </p:style>
-        <p:txBody>
-          <a:bodyPr rtlCol="0" anchor="ctr"/>
-          <a:lstStyle/>
-          <a:p>
-            <a:pPr algn="ctr"/>
-          </a:p>
-        </p:txBody>
-      </p:sp>
-      <p:sp>
-        <p:nvSpPr>
-          <p:cNvPr id="110" name="TextBox 109"/>
-          <p:cNvSpPr txBox="1"/>
-          <p:nvPr/>
-        </p:nvSpPr>
-        <p:spPr>
-          <a:xfrm>
-            <a:off x="4470109" y="3493008"/>
-            <a:ext cx="219456" cy="109728"/>
-          </a:xfrm>
-          <a:prstGeom prst="rect">
-            <a:avLst/>
-          </a:prstGeom>
-          <a:noFill/>
-          <a:effectLst/>
-        </p:spPr>
-        <p:txBody>
-          <a:bodyPr wrap="square" lIns="0" rIns="0" tIns="0" bIns="0" anchor="ctr">
-            <a:spAutoFit/>
-          </a:bodyPr>
-          <a:lstStyle/>
-          <a:p>
-            <a:pPr algn="ctr"/>
-            <a:r>
-              <a:rPr sz="400" b="0" i="0">
-                <a:solidFill>
-                  <a:srgbClr val="0A7D6E"/>
-                </a:solidFill>
-                <a:latin typeface="Arial"/>
-              </a:rPr>
-              <a:t>9</a:t>
-            </a:r>
-          </a:p>
-        </p:txBody>
-      </p:sp>
-      <p:sp>
-        <p:nvSpPr>
-          <p:cNvPr id="111" name="Rectangle 110"/>
-          <p:cNvSpPr/>
-          <p:nvPr/>
-        </p:nvSpPr>
-        <p:spPr>
-          <a:xfrm>
-            <a:off x="4650743" y="1321088"/>
-            <a:ext cx="98546" cy="2153632"/>
-          </a:xfrm>
-          <a:prstGeom prst="rect">
-            <a:avLst/>
-          </a:prstGeom>
-          <a:solidFill>
-            <a:srgbClr val="C53E1F"/>
-          </a:solidFill>
-          <a:ln w="2540">
-            <a:solidFill>
-              <a:srgbClr val="FFFFFF"/>
-            </a:solidFill>
-          </a:ln>
-          <a:effectLst/>
-        </p:spPr>
-        <p:style>
-          <a:lnRef idx="1">
-            <a:schemeClr val="accent1"/>
-          </a:lnRef>
-          <a:fillRef idx="3">
-            <a:schemeClr val="accent1"/>
-          </a:fillRef>
-          <a:effectRef idx="2">
-            <a:schemeClr val="accent1"/>
-          </a:effectRef>
-          <a:fontRef idx="minor">
-            <a:schemeClr val="lt1"/>
-          </a:fontRef>
-        </p:style>
-        <p:txBody>
-          <a:bodyPr rtlCol="0" anchor="ctr"/>
-          <a:lstStyle/>
-          <a:p>
-            <a:pPr algn="ctr"/>
-          </a:p>
-        </p:txBody>
-      </p:sp>
-      <p:sp>
-        <p:nvSpPr>
-          <p:cNvPr id="112" name="Rectangle 111"/>
-          <p:cNvSpPr/>
-          <p:nvPr/>
-        </p:nvSpPr>
-        <p:spPr>
-          <a:xfrm>
-            <a:off x="4650743" y="1321088"/>
-            <a:ext cx="98546" cy="2153632"/>
-          </a:xfrm>
-          <a:prstGeom prst="rect">
-            <a:avLst/>
-          </a:prstGeom>
-          <a:noFill/>
-          <a:ln w="16510">
-            <a:solidFill>
-              <a:srgbClr val="D4A300"/>
-            </a:solidFill>
-          </a:ln>
-          <a:effectLst/>
-        </p:spPr>
-        <p:style>
-          <a:lnRef idx="1">
-            <a:schemeClr val="accent1"/>
-          </a:lnRef>
-          <a:fillRef idx="3">
-            <a:schemeClr val="accent1"/>
-          </a:fillRef>
-          <a:effectRef idx="2">
-            <a:schemeClr val="accent1"/>
-          </a:effectRef>
-          <a:fontRef idx="minor">
-            <a:schemeClr val="lt1"/>
-          </a:fontRef>
-        </p:style>
-        <p:txBody>
-          <a:bodyPr rtlCol="0" anchor="ctr"/>
-          <a:lstStyle/>
-          <a:p>
-            <a:pPr algn="ctr"/>
-          </a:p>
-        </p:txBody>
-      </p:sp>
-      <p:sp>
-        <p:nvSpPr>
-          <p:cNvPr id="113" name="TextBox 112"/>
-          <p:cNvSpPr txBox="1"/>
-          <p:nvPr/>
-        </p:nvSpPr>
-        <p:spPr>
-          <a:xfrm>
-            <a:off x="4626864" y="1174784"/>
-            <a:ext cx="146304" cy="128016"/>
-          </a:xfrm>
-          <a:prstGeom prst="rect">
-            <a:avLst/>
-          </a:prstGeom>
-          <a:noFill/>
-          <a:effectLst/>
-        </p:spPr>
-        <p:txBody>
-          <a:bodyPr wrap="square" lIns="0" rIns="0" tIns="0" bIns="0" anchor="ctr">
-            <a:spAutoFit/>
-          </a:bodyPr>
-          <a:lstStyle/>
-          <a:p>
-            <a:pPr algn="ctr"/>
-            <a:r>
-              <a:rPr sz="1000" b="1" i="0">
-                <a:solidFill>
-                  <a:srgbClr val="D4A300"/>
-                </a:solidFill>
-                <a:latin typeface="Arial"/>
-              </a:rPr>
-              <a:t>✗</a:t>
-            </a:r>
-          </a:p>
-        </p:txBody>
-      </p:sp>
-      <p:sp>
-        <p:nvSpPr>
-          <p:cNvPr id="114" name="TextBox 113"/>
-          <p:cNvSpPr txBox="1"/>
-          <p:nvPr/>
-        </p:nvSpPr>
-        <p:spPr>
-          <a:xfrm>
-            <a:off x="4590288" y="3493008"/>
-            <a:ext cx="219456" cy="109728"/>
-          </a:xfrm>
-          <a:prstGeom prst="rect">
-            <a:avLst/>
-          </a:prstGeom>
-          <a:noFill/>
-          <a:effectLst/>
-        </p:spPr>
-        <p:txBody>
-          <a:bodyPr wrap="square" lIns="0" rIns="0" tIns="0" bIns="0" anchor="ctr">
-            <a:spAutoFit/>
-          </a:bodyPr>
-          <a:lstStyle/>
-          <a:p>
-            <a:pPr algn="ctr"/>
-            <a:r>
-              <a:rPr sz="400" b="0" i="0">
-                <a:solidFill>
-                  <a:srgbClr val="C53E1F"/>
-                </a:solidFill>
-                <a:latin typeface="Arial"/>
-              </a:rPr>
-              <a:t>26</a:t>
-            </a:r>
-          </a:p>
-        </p:txBody>
-      </p:sp>
-      <p:sp>
-        <p:nvSpPr>
-          <p:cNvPr id="115" name="Rectangle 114"/>
-          <p:cNvSpPr/>
-          <p:nvPr/>
-        </p:nvSpPr>
-        <p:spPr>
-          <a:xfrm>
-            <a:off x="4770921" y="1233174"/>
-            <a:ext cx="98546" cy="2241546"/>
-          </a:xfrm>
-          <a:prstGeom prst="rect">
-            <a:avLst/>
-          </a:prstGeom>
-          <a:solidFill>
-            <a:srgbClr val="0A7D6E"/>
-          </a:solidFill>
-          <a:ln w="2540">
-            <a:solidFill>
-              <a:srgbClr val="FFFFFF"/>
-            </a:solidFill>
-          </a:ln>
-          <a:effectLst/>
-        </p:spPr>
-        <p:style>
-          <a:lnRef idx="1">
-            <a:schemeClr val="accent1"/>
-          </a:lnRef>
-          <a:fillRef idx="3">
-            <a:schemeClr val="accent1"/>
-          </a:fillRef>
-          <a:effectRef idx="2">
-            <a:schemeClr val="accent1"/>
-          </a:effectRef>
-          <a:fontRef idx="minor">
-            <a:schemeClr val="lt1"/>
-          </a:fontRef>
-        </p:style>
-        <p:txBody>
-          <a:bodyPr rtlCol="0" anchor="ctr"/>
-          <a:lstStyle/>
-          <a:p>
-            <a:pPr algn="ctr"/>
-          </a:p>
-        </p:txBody>
-      </p:sp>
-      <p:sp>
-        <p:nvSpPr>
-          <p:cNvPr id="116" name="TextBox 115"/>
-          <p:cNvSpPr txBox="1"/>
-          <p:nvPr/>
-        </p:nvSpPr>
-        <p:spPr>
-          <a:xfrm>
-            <a:off x="4710466" y="3493008"/>
-            <a:ext cx="219456" cy="109728"/>
-          </a:xfrm>
-          <a:prstGeom prst="rect">
-            <a:avLst/>
-          </a:prstGeom>
-          <a:noFill/>
-          <a:effectLst/>
-        </p:spPr>
-        <p:txBody>
-          <a:bodyPr wrap="square" lIns="0" rIns="0" tIns="0" bIns="0" anchor="ctr">
-            <a:spAutoFit/>
-          </a:bodyPr>
-          <a:lstStyle/>
-          <a:p>
-            <a:pPr algn="ctr"/>
-            <a:r>
-              <a:rPr sz="400" b="0" i="0">
-                <a:solidFill>
-                  <a:srgbClr val="0A7D6E"/>
-                </a:solidFill>
-                <a:latin typeface="Arial"/>
-              </a:rPr>
-              <a:t>29</a:t>
-            </a:r>
-          </a:p>
-        </p:txBody>
-      </p:sp>
-      <p:sp>
-        <p:nvSpPr>
-          <p:cNvPr id="117" name="Rectangle 116"/>
-          <p:cNvSpPr/>
-          <p:nvPr/>
-        </p:nvSpPr>
-        <p:spPr>
-          <a:xfrm>
-            <a:off x="4891099" y="1217942"/>
-            <a:ext cx="98546" cy="2256778"/>
-          </a:xfrm>
-          <a:prstGeom prst="rect">
-            <a:avLst/>
-          </a:prstGeom>
-          <a:solidFill>
-            <a:srgbClr val="0A7D6E"/>
-          </a:solidFill>
-          <a:ln w="2540">
-            <a:solidFill>
-              <a:srgbClr val="FFFFFF"/>
-            </a:solidFill>
-          </a:ln>
-          <a:effectLst/>
-        </p:spPr>
-        <p:style>
-          <a:lnRef idx="1">
-            <a:schemeClr val="accent1"/>
-          </a:lnRef>
-          <a:fillRef idx="3">
-            <a:schemeClr val="accent1"/>
-          </a:fillRef>
-          <a:effectRef idx="2">
-            <a:schemeClr val="accent1"/>
-          </a:effectRef>
-          <a:fontRef idx="minor">
-            <a:schemeClr val="lt1"/>
-          </a:fontRef>
-        </p:style>
-        <p:txBody>
-          <a:bodyPr rtlCol="0" anchor="ctr"/>
-          <a:lstStyle/>
-          <a:p>
-            <a:pPr algn="ctr"/>
-          </a:p>
-        </p:txBody>
-      </p:sp>
-      <p:sp>
-        <p:nvSpPr>
-          <p:cNvPr id="118" name="TextBox 117"/>
-          <p:cNvSpPr txBox="1"/>
-          <p:nvPr/>
-        </p:nvSpPr>
-        <p:spPr>
-          <a:xfrm>
-            <a:off x="4830644" y="3493008"/>
-            <a:ext cx="219456" cy="109728"/>
-          </a:xfrm>
-          <a:prstGeom prst="rect">
-            <a:avLst/>
-          </a:prstGeom>
-          <a:noFill/>
-          <a:effectLst/>
-        </p:spPr>
-        <p:txBody>
-          <a:bodyPr wrap="square" lIns="0" rIns="0" tIns="0" bIns="0" anchor="ctr">
-            <a:spAutoFit/>
-          </a:bodyPr>
-          <a:lstStyle/>
-          <a:p>
-            <a:pPr algn="ctr"/>
-            <a:r>
-              <a:rPr sz="400" b="0" i="0">
-                <a:solidFill>
-                  <a:srgbClr val="0A7D6E"/>
-                </a:solidFill>
-                <a:latin typeface="Arial"/>
-              </a:rPr>
-              <a:t>3</a:t>
-            </a:r>
-          </a:p>
-        </p:txBody>
-      </p:sp>
-      <p:sp>
-        <p:nvSpPr>
-          <p:cNvPr id="119" name="Rectangle 118"/>
-          <p:cNvSpPr/>
-          <p:nvPr/>
-        </p:nvSpPr>
-        <p:spPr>
-          <a:xfrm>
-            <a:off x="5011277" y="1161735"/>
-            <a:ext cx="98546" cy="2312985"/>
-          </a:xfrm>
-          <a:prstGeom prst="rect">
-            <a:avLst/>
-          </a:prstGeom>
-          <a:solidFill>
-            <a:srgbClr val="0A7D6E"/>
-          </a:solidFill>
-          <a:ln w="2540">
-            <a:solidFill>
-              <a:srgbClr val="FFFFFF"/>
-            </a:solidFill>
-          </a:ln>
-          <a:effectLst/>
-        </p:spPr>
-        <p:style>
-          <a:lnRef idx="1">
-            <a:schemeClr val="accent1"/>
-          </a:lnRef>
-          <a:fillRef idx="3">
-            <a:schemeClr val="accent1"/>
-          </a:fillRef>
-          <a:effectRef idx="2">
-            <a:schemeClr val="accent1"/>
-          </a:effectRef>
-          <a:fontRef idx="minor">
-            <a:schemeClr val="lt1"/>
-          </a:fontRef>
-        </p:style>
-        <p:txBody>
-          <a:bodyPr rtlCol="0" anchor="ctr"/>
-          <a:lstStyle/>
-          <a:p>
-            <a:pPr algn="ctr"/>
-          </a:p>
-        </p:txBody>
-      </p:sp>
-      <p:sp>
-        <p:nvSpPr>
-          <p:cNvPr id="120" name="TextBox 119"/>
-          <p:cNvSpPr txBox="1"/>
-          <p:nvPr/>
-        </p:nvSpPr>
-        <p:spPr>
-          <a:xfrm>
-            <a:off x="4950822" y="3493008"/>
-            <a:ext cx="219456" cy="109728"/>
-          </a:xfrm>
-          <a:prstGeom prst="rect">
-            <a:avLst/>
-          </a:prstGeom>
-          <a:noFill/>
-          <a:effectLst/>
-        </p:spPr>
-        <p:txBody>
-          <a:bodyPr wrap="square" lIns="0" rIns="0" tIns="0" bIns="0" anchor="ctr">
-            <a:spAutoFit/>
-          </a:bodyPr>
-          <a:lstStyle/>
-          <a:p>
-            <a:pPr algn="ctr"/>
-            <a:r>
-              <a:rPr sz="400" b="0" i="0">
-                <a:solidFill>
-                  <a:srgbClr val="0A7D6E"/>
-                </a:solidFill>
-                <a:latin typeface="Arial"/>
-              </a:rPr>
-              <a:t>24</a:t>
-            </a:r>
-          </a:p>
-        </p:txBody>
-      </p:sp>
-      <p:sp>
-        <p:nvSpPr>
-          <p:cNvPr id="121" name="Rectangle 120"/>
-          <p:cNvSpPr/>
-          <p:nvPr/>
-        </p:nvSpPr>
-        <p:spPr>
-          <a:xfrm>
-            <a:off x="3749040" y="603504"/>
-            <a:ext cx="1325880" cy="365760"/>
-          </a:xfrm>
-          <a:prstGeom prst="rect">
-            <a:avLst/>
-          </a:prstGeom>
-          <a:solidFill>
-            <a:srgbClr val="FFFFFF"/>
-          </a:solidFill>
-          <a:ln w="10160">
-            <a:solidFill>
-              <a:srgbClr val="D4A300"/>
-            </a:solidFill>
-          </a:ln>
-          <a:effectLst/>
-        </p:spPr>
-        <p:style>
-          <a:lnRef idx="1">
-            <a:schemeClr val="accent1"/>
-          </a:lnRef>
-          <a:fillRef idx="3">
-            <a:schemeClr val="accent1"/>
-          </a:fillRef>
-          <a:effectRef idx="2">
-            <a:schemeClr val="accent1"/>
-          </a:effectRef>
-          <a:fontRef idx="minor">
-            <a:schemeClr val="lt1"/>
-          </a:fontRef>
-        </p:style>
-        <p:txBody>
-          <a:bodyPr rtlCol="0" anchor="ctr"/>
-          <a:lstStyle/>
-          <a:p>
-            <a:pPr algn="ctr"/>
-          </a:p>
-        </p:txBody>
-      </p:sp>
-      <p:sp>
-        <p:nvSpPr>
-          <p:cNvPr id="122" name="TextBox 121"/>
-          <p:cNvSpPr txBox="1"/>
-          <p:nvPr/>
-        </p:nvSpPr>
-        <p:spPr>
-          <a:xfrm>
-            <a:off x="3749040" y="630936"/>
-            <a:ext cx="1325880" cy="128016"/>
-          </a:xfrm>
-          <a:prstGeom prst="rect">
-            <a:avLst/>
-          </a:prstGeom>
-          <a:noFill/>
-          <a:effectLst/>
-        </p:spPr>
-        <p:txBody>
-          <a:bodyPr wrap="square" lIns="0" rIns="0" tIns="0" bIns="0" anchor="ctr">
-            <a:spAutoFit/>
-          </a:bodyPr>
-          <a:lstStyle/>
-          <a:p>
-            <a:pPr algn="ctr"/>
-            <a:r>
-              <a:rPr sz="700" b="1" i="0">
-                <a:solidFill>
-                  <a:srgbClr val="222222"/>
-                </a:solidFill>
-                <a:latin typeface="Arial"/>
-              </a:rPr>
-              <a:t>21/35 correct @ 0.5</a:t>
-            </a:r>
-          </a:p>
-        </p:txBody>
-      </p:sp>
-      <p:sp>
-        <p:nvSpPr>
-          <p:cNvPr id="123" name="TextBox 122"/>
-          <p:cNvSpPr txBox="1"/>
-          <p:nvPr/>
-        </p:nvSpPr>
-        <p:spPr>
-          <a:xfrm>
-            <a:off x="3749040" y="786384"/>
-            <a:ext cx="1325880" cy="128016"/>
-          </a:xfrm>
-          <a:prstGeom prst="rect">
-            <a:avLst/>
-          </a:prstGeom>
-          <a:noFill/>
-          <a:effectLst/>
-        </p:spPr>
-        <p:txBody>
-          <a:bodyPr wrap="square" lIns="0" rIns="0" tIns="0" bIns="0" anchor="ctr">
-            <a:spAutoFit/>
-          </a:bodyPr>
-          <a:lstStyle/>
-          <a:p>
-            <a:pPr algn="ctr"/>
-            <a:r>
-              <a:rPr sz="600" b="0" i="0">
-                <a:solidFill>
-                  <a:srgbClr val="D4A300"/>
-                </a:solidFill>
-                <a:latin typeface="Arial"/>
-              </a:rPr>
-              <a:t>accuracy = 0.60</a:t>
-            </a:r>
-          </a:p>
-        </p:txBody>
-      </p:sp>
-      <p:sp>
-        <p:nvSpPr>
-          <p:cNvPr id="124" name="Rectangle 123"/>
-          <p:cNvSpPr/>
-          <p:nvPr/>
-        </p:nvSpPr>
-        <p:spPr>
-          <a:xfrm>
-            <a:off x="1024128" y="594360"/>
-            <a:ext cx="146304" cy="128016"/>
-          </a:xfrm>
-          <a:prstGeom prst="rect">
-            <a:avLst/>
-          </a:prstGeom>
-          <a:solidFill>
-            <a:srgbClr val="0A7D6E"/>
-          </a:solidFill>
-          <a:ln>
-            <a:noFill/>
-          </a:ln>
-          <a:effectLst/>
-        </p:spPr>
-        <p:style>
-          <a:lnRef idx="1">
-            <a:schemeClr val="accent1"/>
-          </a:lnRef>
-          <a:fillRef idx="3">
-            <a:schemeClr val="accent1"/>
-          </a:fillRef>
-          <a:effectRef idx="2">
-            <a:schemeClr val="accent1"/>
-          </a:effectRef>
-          <a:fontRef idx="minor">
-            <a:schemeClr val="lt1"/>
-          </a:fontRef>
-        </p:style>
-        <p:txBody>
-          <a:bodyPr rtlCol="0" anchor="ctr"/>
-          <a:lstStyle/>
-          <a:p>
-            <a:pPr algn="ctr"/>
-          </a:p>
-        </p:txBody>
-      </p:sp>
-      <p:sp>
-        <p:nvSpPr>
-          <p:cNvPr id="125" name="TextBox 124"/>
-          <p:cNvSpPr txBox="1"/>
-          <p:nvPr/>
-        </p:nvSpPr>
-        <p:spPr>
-          <a:xfrm>
-            <a:off x="1207008" y="584360"/>
-            <a:ext cx="1280160" cy="182880"/>
-          </a:xfrm>
-          <a:prstGeom prst="rect">
-            <a:avLst/>
-          </a:prstGeom>
-          <a:noFill/>
-          <a:effectLst/>
-        </p:spPr>
-        <p:txBody>
-          <a:bodyPr wrap="square" lIns="0" rIns="0" tIns="0" bIns="0" anchor="ctr">
-            <a:spAutoFit/>
-          </a:bodyPr>
-          <a:lstStyle/>
-          <a:p>
-            <a:pPr algn="l"/>
-            <a:r>
-              <a:rPr sz="700" b="0" i="0">
-                <a:solidFill>
-                  <a:srgbClr val="222222"/>
-                </a:solidFill>
-                <a:latin typeface="Arial"/>
-              </a:rPr>
-              <a:t>true label: good</a:t>
-            </a:r>
-          </a:p>
-        </p:txBody>
-      </p:sp>
-      <p:sp>
-        <p:nvSpPr>
-          <p:cNvPr id="126" name="Rectangle 125"/>
-          <p:cNvSpPr/>
-          <p:nvPr/>
-        </p:nvSpPr>
-        <p:spPr>
-          <a:xfrm>
-            <a:off x="2487168" y="594360"/>
-            <a:ext cx="146304" cy="128016"/>
-          </a:xfrm>
-          <a:prstGeom prst="rect">
-            <a:avLst/>
-          </a:prstGeom>
-          <a:solidFill>
-            <a:srgbClr val="C53E1F"/>
-          </a:solidFill>
-          <a:ln>
-            <a:noFill/>
-          </a:ln>
-          <a:effectLst/>
-        </p:spPr>
-        <p:style>
-          <a:lnRef idx="1">
-            <a:schemeClr val="accent1"/>
-          </a:lnRef>
-          <a:fillRef idx="3">
-            <a:schemeClr val="accent1"/>
-          </a:fillRef>
-          <a:effectRef idx="2">
-            <a:schemeClr val="accent1"/>
-          </a:effectRef>
-          <a:fontRef idx="minor">
-            <a:schemeClr val="lt1"/>
-          </a:fontRef>
-        </p:style>
-        <p:txBody>
-          <a:bodyPr rtlCol="0" anchor="ctr"/>
-          <a:lstStyle/>
-          <a:p>
-            <a:pPr algn="ctr"/>
-          </a:p>
-        </p:txBody>
-      </p:sp>
-      <p:sp>
-        <p:nvSpPr>
-          <p:cNvPr id="127" name="TextBox 126"/>
-          <p:cNvSpPr txBox="1"/>
-          <p:nvPr/>
-        </p:nvSpPr>
-        <p:spPr>
-          <a:xfrm>
-            <a:off x="2651760" y="584360"/>
-            <a:ext cx="1280160" cy="182880"/>
-          </a:xfrm>
-          <a:prstGeom prst="rect">
-            <a:avLst/>
-          </a:prstGeom>
-          <a:noFill/>
-          <a:effectLst/>
-        </p:spPr>
-        <p:txBody>
-          <a:bodyPr wrap="square" lIns="0" rIns="0" tIns="0" bIns="0" anchor="ctr">
-            <a:spAutoFit/>
-          </a:bodyPr>
-          <a:lstStyle/>
-          <a:p>
-            <a:pPr algn="l"/>
-            <a:r>
-              <a:rPr sz="700" b="0" i="0">
-                <a:solidFill>
-                  <a:srgbClr val="222222"/>
-                </a:solidFill>
-                <a:latin typeface="Arial"/>
-              </a:rPr>
-              <a:t>true label: bad</a:t>
-            </a:r>
-          </a:p>
-        </p:txBody>
-      </p:sp>
-      <p:sp>
-        <p:nvSpPr>
-          <p:cNvPr id="128" name="TextBox 127"/>
-          <p:cNvSpPr txBox="1"/>
-          <p:nvPr/>
-        </p:nvSpPr>
-        <p:spPr>
-          <a:xfrm>
-            <a:off x="3950208" y="584360"/>
-            <a:ext cx="1828800" cy="182880"/>
-          </a:xfrm>
-          <a:prstGeom prst="rect">
-            <a:avLst/>
-          </a:prstGeom>
-          <a:noFill/>
-          <a:effectLst/>
-        </p:spPr>
-        <p:txBody>
-          <a:bodyPr wrap="square" lIns="0" rIns="0" tIns="0" bIns="0" anchor="ctr">
-            <a:spAutoFit/>
-          </a:bodyPr>
-          <a:lstStyle/>
-          <a:p>
-            <a:pPr algn="l"/>
-            <a:r>
-              <a:rPr sz="600" b="1" i="0">
-                <a:solidFill>
-                  <a:srgbClr val="D4A300"/>
-                </a:solidFill>
-                <a:latin typeface="Arial"/>
-              </a:rPr>
-              <a:t>✗ / gold border = misclassified at P = 0.5</a:t>
             </a:r>
           </a:p>
         </p:txBody>
